--- a/material/5_AI/06_PyTorch(1).pptx
+++ b/material/5_AI/06_PyTorch(1).pptx
@@ -8,13 +8,13 @@
     <p:notesMasterId r:id="rId41"/>
   </p:notesMasterIdLst>
   <p:sldIdLst>
-    <p:sldId id="1004" r:id="rId2"/>
+    <p:sldId id="1013" r:id="rId2"/>
     <p:sldId id="700" r:id="rId3"/>
     <p:sldId id="701" r:id="rId4"/>
     <p:sldId id="702" r:id="rId5"/>
     <p:sldId id="703" r:id="rId6"/>
-    <p:sldId id="704" r:id="rId7"/>
-    <p:sldId id="707" r:id="rId8"/>
+    <p:sldId id="707" r:id="rId7"/>
+    <p:sldId id="704" r:id="rId8"/>
     <p:sldId id="674" r:id="rId9"/>
     <p:sldId id="672" r:id="rId10"/>
     <p:sldId id="600" r:id="rId11"/>
@@ -167,6 +167,64 @@
 </p:presentation>
 </file>
 
+<file path=ppt/ink/ink1.xml><?xml version="1.0" encoding="utf-8"?>
+<inkml:ink xmlns:inkml="http://www.w3.org/2003/InkML">
+  <inkml:definitions>
+    <inkml:context xml:id="ctx0">
+      <inkml:inkSource xml:id="inkSrc0">
+        <inkml:traceFormat>
+          <inkml:channel name="X" type="integer" min="-2.14748E9" max="2.14748E9" units="cm"/>
+          <inkml:channel name="Y" type="integer" min="-2.14748E9" max="2.14748E9" units="cm"/>
+        </inkml:traceFormat>
+        <inkml:channelProperties>
+          <inkml:channelProperty channel="X" name="resolution" value="1000" units="1/cm"/>
+          <inkml:channelProperty channel="Y" name="resolution" value="1000" units="1/cm"/>
+        </inkml:channelProperties>
+      </inkml:inkSource>
+      <inkml:timestamp xml:id="ts0" timeString="2026-02-10T07:47:55.467"/>
+    </inkml:context>
+    <inkml:brush xml:id="br0">
+      <inkml:brushProperty name="width" value="0.3" units="cm"/>
+      <inkml:brushProperty name="height" value="0.6" units="cm"/>
+      <inkml:brushProperty name="color" value="#FFFC00"/>
+      <inkml:brushProperty name="tip" value="rectangle"/>
+      <inkml:brushProperty name="rasterOp" value="maskPen"/>
+      <inkml:brushProperty name="ignorePressure" value="1"/>
+    </inkml:brush>
+  </inkml:definitions>
+  <inkml:trace contextRef="#ctx0" brushRef="#br0">0 0,'3300'0,"-3274"0</inkml:trace>
+</inkml:ink>
+</file>
+
+<file path=ppt/ink/ink2.xml><?xml version="1.0" encoding="utf-8"?>
+<inkml:ink xmlns:inkml="http://www.w3.org/2003/InkML">
+  <inkml:definitions>
+    <inkml:context xml:id="ctx0">
+      <inkml:inkSource xml:id="inkSrc0">
+        <inkml:traceFormat>
+          <inkml:channel name="X" type="integer" min="-2.14748E9" max="2.14748E9" units="cm"/>
+          <inkml:channel name="Y" type="integer" min="-2.14748E9" max="2.14748E9" units="cm"/>
+        </inkml:traceFormat>
+        <inkml:channelProperties>
+          <inkml:channelProperty channel="X" name="resolution" value="1000" units="1/cm"/>
+          <inkml:channelProperty channel="Y" name="resolution" value="1000" units="1/cm"/>
+        </inkml:channelProperties>
+      </inkml:inkSource>
+      <inkml:timestamp xml:id="ts0" timeString="2026-02-10T07:48:02.404"/>
+    </inkml:context>
+    <inkml:brush xml:id="br0">
+      <inkml:brushProperty name="width" value="0.3" units="cm"/>
+      <inkml:brushProperty name="height" value="0.6" units="cm"/>
+      <inkml:brushProperty name="color" value="#FFFC00"/>
+      <inkml:brushProperty name="tip" value="rectangle"/>
+      <inkml:brushProperty name="rasterOp" value="maskPen"/>
+      <inkml:brushProperty name="ignorePressure" value="1"/>
+    </inkml:brush>
+  </inkml:definitions>
+  <inkml:trace contextRef="#ctx0" brushRef="#br0">1 0,'1613'0,"-1583"0</inkml:trace>
+</inkml:ink>
+</file>
+
 <file path=ppt/notesMasters/notesMaster1.xml><?xml version="1.0" encoding="utf-8"?>
 <p:notesMaster xmlns:a="http://schemas.openxmlformats.org/drawingml/2006/main" xmlns:r="http://schemas.openxmlformats.org/officeDocument/2006/relationships" xmlns:p="http://schemas.openxmlformats.org/presentationml/2006/main">
   <p:cSld>
@@ -256,7 +314,7 @@
             <a:fld id="{A13A867C-D490-40C2-AB8D-A60FA70A9BF5}" type="datetimeFigureOut">
               <a:rPr lang="ko-KR" altLang="en-US" smtClean="0"/>
               <a:pPr/>
-              <a:t>2025-09-11</a:t>
+              <a:t>2026-02-10</a:t>
             </a:fld>
             <a:endParaRPr lang="ko-KR" altLang="en-US" dirty="0"/>
           </a:p>
@@ -631,6 +689,203 @@
 </p:notes>
 </file>
 
+<file path=ppt/notesSlides/notesSlide10.xml><?xml version="1.0" encoding="utf-8"?>
+<p:notes xmlns:a="http://schemas.openxmlformats.org/drawingml/2006/main" xmlns:r="http://schemas.openxmlformats.org/officeDocument/2006/relationships" xmlns:p="http://schemas.openxmlformats.org/presentationml/2006/main">
+  <p:cSld>
+    <p:spTree>
+      <p:nvGrpSpPr>
+        <p:cNvPr id="1" name=""/>
+        <p:cNvGrpSpPr/>
+        <p:nvPr/>
+      </p:nvGrpSpPr>
+      <p:grpSpPr>
+        <a:xfrm>
+          <a:off x="0" y="0"/>
+          <a:ext cx="0" cy="0"/>
+          <a:chOff x="0" y="0"/>
+          <a:chExt cx="0" cy="0"/>
+        </a:xfrm>
+      </p:grpSpPr>
+      <p:sp>
+        <p:nvSpPr>
+          <p:cNvPr id="2" name="슬라이드 이미지 개체 틀 1"/>
+          <p:cNvSpPr>
+            <a:spLocks noGrp="1" noRot="1" noChangeAspect="1"/>
+          </p:cNvSpPr>
+          <p:nvPr>
+            <p:ph type="sldImg"/>
+          </p:nvPr>
+        </p:nvSpPr>
+        <p:spPr/>
+      </p:sp>
+      <p:sp>
+        <p:nvSpPr>
+          <p:cNvPr id="3" name="슬라이드 노트 개체 틀 2"/>
+          <p:cNvSpPr>
+            <a:spLocks noGrp="1"/>
+          </p:cNvSpPr>
+          <p:nvPr>
+            <p:ph type="body" idx="1"/>
+          </p:nvPr>
+        </p:nvSpPr>
+        <p:spPr/>
+        <p:txBody>
+          <a:bodyPr/>
+          <a:lstStyle/>
+          <a:p>
+            <a:r>
+              <a:rPr lang="en-US" altLang="ko-KR" dirty="0"/>
+              <a:t>02_operations.ipynb</a:t>
+            </a:r>
+            <a:endParaRPr lang="ko-KR" altLang="en-US" dirty="0"/>
+          </a:p>
+        </p:txBody>
+      </p:sp>
+      <p:sp>
+        <p:nvSpPr>
+          <p:cNvPr id="4" name="슬라이드 번호 개체 틀 3"/>
+          <p:cNvSpPr>
+            <a:spLocks noGrp="1"/>
+          </p:cNvSpPr>
+          <p:nvPr>
+            <p:ph type="sldNum" sz="quarter" idx="5"/>
+          </p:nvPr>
+        </p:nvSpPr>
+        <p:spPr/>
+        <p:txBody>
+          <a:bodyPr/>
+          <a:lstStyle/>
+          <a:p>
+            <a:fld id="{3E35EA20-6519-4513-9EDC-C89C5369BAEC}" type="slidenum">
+              <a:rPr lang="ko-KR" altLang="en-US" smtClean="0"/>
+              <a:pPr/>
+              <a:t>31</a:t>
+            </a:fld>
+            <a:endParaRPr lang="ko-KR" altLang="en-US" dirty="0"/>
+          </a:p>
+        </p:txBody>
+      </p:sp>
+    </p:spTree>
+    <p:extLst>
+      <p:ext uri="{BB962C8B-B14F-4D97-AF65-F5344CB8AC3E}">
+        <p14:creationId xmlns:p14="http://schemas.microsoft.com/office/powerpoint/2010/main" val="1928982731"/>
+      </p:ext>
+    </p:extLst>
+  </p:cSld>
+  <p:clrMapOvr>
+    <a:masterClrMapping/>
+  </p:clrMapOvr>
+</p:notes>
+</file>
+
+<file path=ppt/notesSlides/notesSlide11.xml><?xml version="1.0" encoding="utf-8"?>
+<p:notes xmlns:a="http://schemas.openxmlformats.org/drawingml/2006/main" xmlns:r="http://schemas.openxmlformats.org/officeDocument/2006/relationships" xmlns:p="http://schemas.openxmlformats.org/presentationml/2006/main">
+  <p:cSld>
+    <p:spTree>
+      <p:nvGrpSpPr>
+        <p:cNvPr id="1" name="">
+          <a:extLst>
+            <a:ext uri="{FF2B5EF4-FFF2-40B4-BE49-F238E27FC236}">
+              <a16:creationId xmlns:a16="http://schemas.microsoft.com/office/drawing/2014/main" id="{A9D2EE83-52CB-E118-49CB-3EBDD6EF25B9}"/>
+            </a:ext>
+          </a:extLst>
+        </p:cNvPr>
+        <p:cNvGrpSpPr/>
+        <p:nvPr/>
+      </p:nvGrpSpPr>
+      <p:grpSpPr>
+        <a:xfrm>
+          <a:off x="0" y="0"/>
+          <a:ext cx="0" cy="0"/>
+          <a:chOff x="0" y="0"/>
+          <a:chExt cx="0" cy="0"/>
+        </a:xfrm>
+      </p:grpSpPr>
+      <p:sp>
+        <p:nvSpPr>
+          <p:cNvPr id="2" name="슬라이드 이미지 개체 틀 1">
+            <a:extLst>
+              <a:ext uri="{FF2B5EF4-FFF2-40B4-BE49-F238E27FC236}">
+                <a16:creationId xmlns:a16="http://schemas.microsoft.com/office/drawing/2014/main" id="{30F83B01-3943-C359-9322-8EB719FB824B}"/>
+              </a:ext>
+            </a:extLst>
+          </p:cNvPr>
+          <p:cNvSpPr>
+            <a:spLocks noGrp="1" noRot="1" noChangeAspect="1"/>
+          </p:cNvSpPr>
+          <p:nvPr>
+            <p:ph type="sldImg"/>
+          </p:nvPr>
+        </p:nvSpPr>
+        <p:spPr/>
+      </p:sp>
+      <p:sp>
+        <p:nvSpPr>
+          <p:cNvPr id="3" name="슬라이드 노트 개체 틀 2">
+            <a:extLst>
+              <a:ext uri="{FF2B5EF4-FFF2-40B4-BE49-F238E27FC236}">
+                <a16:creationId xmlns:a16="http://schemas.microsoft.com/office/drawing/2014/main" id="{F2F259CF-8156-0FB2-87BB-C2421F329EA1}"/>
+              </a:ext>
+            </a:extLst>
+          </p:cNvPr>
+          <p:cNvSpPr>
+            <a:spLocks noGrp="1"/>
+          </p:cNvSpPr>
+          <p:nvPr>
+            <p:ph type="body" idx="1"/>
+          </p:nvPr>
+        </p:nvSpPr>
+        <p:spPr/>
+        <p:txBody>
+          <a:bodyPr/>
+          <a:lstStyle/>
+          <a:p>
+            <a:endParaRPr lang="ko-KR" altLang="en-US" dirty="0"/>
+          </a:p>
+        </p:txBody>
+      </p:sp>
+      <p:sp>
+        <p:nvSpPr>
+          <p:cNvPr id="4" name="슬라이드 번호 개체 틀 3">
+            <a:extLst>
+              <a:ext uri="{FF2B5EF4-FFF2-40B4-BE49-F238E27FC236}">
+                <a16:creationId xmlns:a16="http://schemas.microsoft.com/office/drawing/2014/main" id="{5301DD34-5BFE-877A-E657-9B3A6B1B5CDD}"/>
+              </a:ext>
+            </a:extLst>
+          </p:cNvPr>
+          <p:cNvSpPr>
+            <a:spLocks noGrp="1"/>
+          </p:cNvSpPr>
+          <p:nvPr>
+            <p:ph type="sldNum" sz="quarter" idx="10"/>
+          </p:nvPr>
+        </p:nvSpPr>
+        <p:spPr/>
+        <p:txBody>
+          <a:bodyPr/>
+          <a:lstStyle/>
+          <a:p>
+            <a:fld id="{A0085365-8376-4996-BDD6-F39608FADAF3}" type="slidenum">
+              <a:rPr lang="ko-KR" altLang="en-US" smtClean="0"/>
+              <a:t>39</a:t>
+            </a:fld>
+            <a:endParaRPr lang="ko-KR" altLang="en-US"/>
+          </a:p>
+        </p:txBody>
+      </p:sp>
+    </p:spTree>
+    <p:extLst>
+      <p:ext uri="{BB962C8B-B14F-4D97-AF65-F5344CB8AC3E}">
+        <p14:creationId xmlns:p14="http://schemas.microsoft.com/office/powerpoint/2010/main" val="2391645545"/>
+      </p:ext>
+    </p:extLst>
+  </p:cSld>
+  <p:clrMapOvr>
+    <a:masterClrMapping/>
+  </p:clrMapOvr>
+</p:notes>
+</file>
+
 <file path=ppt/notesSlides/notesSlide2.xml><?xml version="1.0" encoding="utf-8"?>
 <p:notes xmlns:a="http://schemas.openxmlformats.org/drawingml/2006/main" xmlns:r="http://schemas.openxmlformats.org/officeDocument/2006/relationships" xmlns:p="http://schemas.openxmlformats.org/presentationml/2006/main">
   <p:cSld>
@@ -676,14 +931,76 @@
           <a:lstStyle/>
           <a:p>
             <a:r>
-              <a:rPr lang="en-US" altLang="ko-KR" dirty="0">
-                <a:ea typeface="맑은 고딕"/>
-              </a:rPr>
-              <a:t>https://www.assemblyai.com/blog/pytorch-vs-tensorflow-in-2023/</a:t>
-            </a:r>
-            <a:endParaRPr lang="ko-KR" dirty="0">
-              <a:ea typeface="맑은 고딕"/>
-            </a:endParaRPr>
+              <a:rPr lang="ko-KR" altLang="en-US" dirty="0"/>
+              <a:t>지금까지 우리는</a:t>
+            </a:r>
+            <a:br>
+              <a:rPr lang="ko-KR" altLang="en-US" dirty="0"/>
+            </a:br>
+            <a:r>
+              <a:rPr lang="ko-KR" altLang="en-US" dirty="0"/>
+              <a:t>데이터를 어떻게 다뤄야 하는지에 대한</a:t>
+            </a:r>
+            <a:br>
+              <a:rPr lang="ko-KR" altLang="en-US" dirty="0"/>
+            </a:br>
+            <a:r>
+              <a:rPr lang="ko-KR" altLang="en-US" b="1" dirty="0"/>
+              <a:t>규칙과 관점</a:t>
+            </a:r>
+            <a:r>
+              <a:rPr lang="ko-KR" altLang="en-US" dirty="0"/>
+              <a:t>을 배웠습니다</a:t>
+            </a:r>
+            <a:r>
+              <a:rPr lang="en-US" altLang="ko-KR" dirty="0"/>
+              <a:t>.</a:t>
+            </a:r>
+          </a:p>
+          <a:p>
+            <a:r>
+              <a:rPr lang="ko-KR" altLang="en-US" dirty="0"/>
+              <a:t>이제부터는</a:t>
+            </a:r>
+            <a:br>
+              <a:rPr lang="ko-KR" altLang="en-US" dirty="0"/>
+            </a:br>
+            <a:r>
+              <a:rPr lang="ko-KR" altLang="en-US" dirty="0"/>
+              <a:t>이 규칙을 지킨 상태에서</a:t>
+            </a:r>
+            <a:br>
+              <a:rPr lang="ko-KR" altLang="en-US" dirty="0"/>
+            </a:br>
+            <a:r>
+              <a:rPr lang="ko-KR" altLang="en-US" b="1" dirty="0"/>
+              <a:t>컴퓨터가 실제로 계산하고 학습하도록 만드는 방법</a:t>
+            </a:r>
+            <a:r>
+              <a:rPr lang="ko-KR" altLang="en-US" dirty="0"/>
+              <a:t>을 배웁니다</a:t>
+            </a:r>
+            <a:r>
+              <a:rPr lang="en-US" altLang="ko-KR" dirty="0"/>
+              <a:t>.</a:t>
+            </a:r>
+          </a:p>
+          <a:p>
+            <a:r>
+              <a:rPr lang="ko-KR" altLang="en-US" dirty="0"/>
+              <a:t>그 계산 도구가 바로 </a:t>
+            </a:r>
+            <a:r>
+              <a:rPr lang="en-US" altLang="ko-KR" b="1" dirty="0" err="1"/>
+              <a:t>PyTorch</a:t>
+            </a:r>
+            <a:r>
+              <a:rPr lang="ko-KR" altLang="en-US" dirty="0"/>
+              <a:t>입니다</a:t>
+            </a:r>
+          </a:p>
+          <a:p>
+            <a:endParaRPr lang="ko-KR" altLang="en-US" dirty="0"/>
           </a:p>
         </p:txBody>
       </p:sp>
@@ -702,18 +1019,19 @@
           <a:bodyPr/>
           <a:lstStyle/>
           <a:p>
-            <a:fld id="{C09E5BFC-1559-42F1-8940-AB342D56BF02}" type="slidenum">
+            <a:fld id="{3E35EA20-6519-4513-9EDC-C89C5369BAEC}" type="slidenum">
               <a:rPr lang="ko-KR" altLang="en-US" smtClean="0"/>
-              <a:t>4</a:t>
+              <a:pPr/>
+              <a:t>3</a:t>
             </a:fld>
-            <a:endParaRPr lang="ko-KR" altLang="en-US"/>
+            <a:endParaRPr lang="ko-KR" altLang="en-US" dirty="0"/>
           </a:p>
         </p:txBody>
       </p:sp>
     </p:spTree>
     <p:extLst>
       <p:ext uri="{BB962C8B-B14F-4D97-AF65-F5344CB8AC3E}">
-        <p14:creationId xmlns:p14="http://schemas.microsoft.com/office/powerpoint/2010/main" val="709641017"/>
+        <p14:creationId xmlns:p14="http://schemas.microsoft.com/office/powerpoint/2010/main" val="1855226400"/>
       </p:ext>
     </p:extLst>
   </p:cSld>
@@ -767,6 +1085,12 @@
           <a:bodyPr/>
           <a:lstStyle/>
           <a:p>
+            <a:r>
+              <a:rPr lang="en-US" altLang="ko-KR" dirty="0">
+                <a:ea typeface="맑은 고딕"/>
+              </a:rPr>
+              <a:t>https://www.assemblyai.com/blog/pytorch-vs-tensorflow-in-2023/</a:t>
+            </a:r>
             <a:endParaRPr lang="ko-KR" dirty="0">
               <a:ea typeface="맑은 고딕"/>
             </a:endParaRPr>
@@ -790,7 +1114,7 @@
           <a:p>
             <a:fld id="{C09E5BFC-1559-42F1-8940-AB342D56BF02}" type="slidenum">
               <a:rPr lang="ko-KR" altLang="en-US" smtClean="0"/>
-              <a:t>5</a:t>
+              <a:t>4</a:t>
             </a:fld>
             <a:endParaRPr lang="ko-KR" altLang="en-US"/>
           </a:p>
@@ -853,7 +1177,170 @@
           <a:bodyPr/>
           <a:lstStyle/>
           <a:p>
-            <a:endParaRPr lang="ko-KR" altLang="en-US" dirty="0"/>
+            <a:r>
+              <a:rPr lang="en-US" altLang="ko-KR" dirty="0" err="1"/>
+              <a:t>PyTorch</a:t>
+            </a:r>
+            <a:r>
+              <a:rPr lang="ko-KR" altLang="en-US" dirty="0"/>
+              <a:t>는 하나의 프로그램이 아니라</a:t>
+            </a:r>
+            <a:br>
+              <a:rPr lang="ko-KR" altLang="en-US" dirty="0"/>
+            </a:br>
+            <a:r>
+              <a:rPr lang="ko-KR" altLang="en-US" b="1" dirty="0"/>
+              <a:t>여러 층으로 쌓인 구조</a:t>
+            </a:r>
+            <a:r>
+              <a:rPr lang="ko-KR" altLang="en-US" dirty="0"/>
+              <a:t>입니다</a:t>
+            </a:r>
+            <a:r>
+              <a:rPr lang="en-US" altLang="ko-KR" dirty="0"/>
+              <a:t>.</a:t>
+            </a:r>
+          </a:p>
+          <a:p>
+            <a:endParaRPr lang="en-US" altLang="ko-KR" dirty="0"/>
+          </a:p>
+          <a:p>
+            <a:r>
+              <a:rPr lang="ko-KR" altLang="en-US" dirty="0"/>
+              <a:t>여러분이 쓰게 될 건</a:t>
+            </a:r>
+            <a:br>
+              <a:rPr lang="ko-KR" altLang="en-US" dirty="0"/>
+            </a:br>
+            <a:r>
+              <a:rPr lang="ko-KR" altLang="en-US" dirty="0"/>
+              <a:t>이 맨 위에 있는 </a:t>
+            </a:r>
+            <a:r>
+              <a:rPr lang="en-US" altLang="ko-KR" b="1" dirty="0"/>
+              <a:t>Python API</a:t>
+            </a:r>
+            <a:r>
+              <a:rPr lang="ko-KR" altLang="en-US" dirty="0"/>
+              <a:t>입니다</a:t>
+            </a:r>
+            <a:r>
+              <a:rPr lang="en-US" altLang="ko-KR" dirty="0"/>
+              <a:t>.”</a:t>
+            </a:r>
+          </a:p>
+          <a:p>
+            <a:r>
+              <a:rPr lang="en-US" altLang="ko-KR" dirty="0"/>
+              <a:t>“</a:t>
+            </a:r>
+            <a:r>
+              <a:rPr lang="ko-KR" altLang="en-US" dirty="0"/>
+              <a:t>아래쪽 </a:t>
+            </a:r>
+            <a:r>
+              <a:rPr lang="en-US" altLang="ko-KR" dirty="0"/>
+              <a:t>C++, CUDA, </a:t>
+            </a:r>
+            <a:r>
+              <a:rPr lang="ko-KR" altLang="en-US" dirty="0"/>
+              <a:t>엔진 부분은</a:t>
+            </a:r>
+            <a:br>
+              <a:rPr lang="ko-KR" altLang="en-US" dirty="0"/>
+            </a:br>
+            <a:r>
+              <a:rPr lang="ko-KR" altLang="en-US" b="1" dirty="0"/>
+              <a:t>우리가 직접 다루지 않습니다</a:t>
+            </a:r>
+            <a:r>
+              <a:rPr lang="en-US" altLang="ko-KR" b="1" dirty="0"/>
+              <a:t>.</a:t>
+            </a:r>
+            <a:r>
+              <a:rPr lang="ko-KR" altLang="en-US" dirty="0"/>
+              <a:t>”</a:t>
+            </a:r>
+          </a:p>
+          <a:p>
+            <a:endParaRPr lang="en-US" altLang="ko-KR" dirty="0"/>
+          </a:p>
+          <a:p>
+            <a:r>
+              <a:rPr lang="ko-KR" altLang="en-US" dirty="0"/>
+              <a:t>앞에서 우리는</a:t>
+            </a:r>
+            <a:br>
+              <a:rPr lang="ko-KR" altLang="en-US" dirty="0"/>
+            </a:br>
+            <a:r>
+              <a:rPr lang="ko-KR" altLang="en-US" dirty="0"/>
+              <a:t>데이터를 어떻게 다뤄야 하는지</a:t>
+            </a:r>
+            <a:br>
+              <a:rPr lang="ko-KR" altLang="en-US" dirty="0"/>
+            </a:br>
+            <a:r>
+              <a:rPr lang="ko-KR" altLang="en-US" b="1" dirty="0"/>
+              <a:t>규칙</a:t>
+            </a:r>
+            <a:r>
+              <a:rPr lang="ko-KR" altLang="en-US" dirty="0"/>
+              <a:t>을 배웠습니다</a:t>
+            </a:r>
+            <a:r>
+              <a:rPr lang="en-US" altLang="ko-KR" dirty="0"/>
+              <a:t>.”</a:t>
+            </a:r>
+          </a:p>
+          <a:p>
+            <a:r>
+              <a:rPr lang="en-US" altLang="ko-KR" dirty="0"/>
+              <a:t>“</a:t>
+            </a:r>
+            <a:r>
+              <a:rPr lang="en-US" altLang="ko-KR" dirty="0" err="1"/>
+              <a:t>PyTorch</a:t>
+            </a:r>
+            <a:r>
+              <a:rPr lang="ko-KR" altLang="en-US" dirty="0"/>
+              <a:t>는</a:t>
+            </a:r>
+            <a:br>
+              <a:rPr lang="ko-KR" altLang="en-US" dirty="0"/>
+            </a:br>
+            <a:r>
+              <a:rPr lang="ko-KR" altLang="en-US" dirty="0"/>
+              <a:t>그 규칙을 지킨 데이터를</a:t>
+            </a:r>
+            <a:br>
+              <a:rPr lang="ko-KR" altLang="en-US" dirty="0"/>
+            </a:br>
+            <a:r>
+              <a:rPr lang="ko-KR" altLang="en-US" b="1" dirty="0"/>
+              <a:t>빠르게 계산해주는 엔진</a:t>
+            </a:r>
+            <a:r>
+              <a:rPr lang="ko-KR" altLang="en-US" dirty="0"/>
+              <a:t>입니다</a:t>
+            </a:r>
+            <a:r>
+              <a:rPr lang="en-US" altLang="ko-KR" dirty="0"/>
+              <a:t>.”</a:t>
+            </a:r>
+          </a:p>
+          <a:p>
+            <a:endParaRPr lang="en-US" altLang="ko-KR" dirty="0"/>
+          </a:p>
+          <a:p>
+            <a:endParaRPr lang="en-US" altLang="ko-KR" dirty="0">
+              <a:ea typeface="맑은 고딕"/>
+            </a:endParaRPr>
+          </a:p>
+          <a:p>
+            <a:endParaRPr lang="ko-KR" dirty="0">
+              <a:ea typeface="맑은 고딕"/>
+            </a:endParaRPr>
           </a:p>
         </p:txBody>
       </p:sp>
@@ -874,7 +1361,7 @@
           <a:p>
             <a:fld id="{C09E5BFC-1559-42F1-8940-AB342D56BF02}" type="slidenum">
               <a:rPr lang="ko-KR" altLang="en-US" smtClean="0"/>
-              <a:t>12</a:t>
+              <a:t>5</a:t>
             </a:fld>
             <a:endParaRPr lang="ko-KR" altLang="en-US"/>
           </a:p>
@@ -883,7 +1370,7 @@
     </p:spTree>
     <p:extLst>
       <p:ext uri="{BB962C8B-B14F-4D97-AF65-F5344CB8AC3E}">
-        <p14:creationId xmlns:p14="http://schemas.microsoft.com/office/powerpoint/2010/main" val="3589031296"/>
+        <p14:creationId xmlns:p14="http://schemas.microsoft.com/office/powerpoint/2010/main" val="709641017"/>
       </p:ext>
     </p:extLst>
   </p:cSld>
@@ -898,13 +1385,7 @@
   <p:cSld>
     <p:spTree>
       <p:nvGrpSpPr>
-        <p:cNvPr id="1" name="">
-          <a:extLst>
-            <a:ext uri="{FF2B5EF4-FFF2-40B4-BE49-F238E27FC236}">
-              <a16:creationId xmlns:a16="http://schemas.microsoft.com/office/drawing/2014/main" id="{A9D2EE83-52CB-E118-49CB-3EBDD6EF25B9}"/>
-            </a:ext>
-          </a:extLst>
-        </p:cNvPr>
+        <p:cNvPr id="1" name=""/>
         <p:cNvGrpSpPr/>
         <p:nvPr/>
       </p:nvGrpSpPr>
@@ -918,13 +1399,7 @@
       </p:grpSpPr>
       <p:sp>
         <p:nvSpPr>
-          <p:cNvPr id="2" name="슬라이드 이미지 개체 틀 1">
-            <a:extLst>
-              <a:ext uri="{FF2B5EF4-FFF2-40B4-BE49-F238E27FC236}">
-                <a16:creationId xmlns:a16="http://schemas.microsoft.com/office/drawing/2014/main" id="{30F83B01-3943-C359-9322-8EB719FB824B}"/>
-              </a:ext>
-            </a:extLst>
-          </p:cNvPr>
+          <p:cNvPr id="2" name="슬라이드 이미지 개체 틀 1"/>
           <p:cNvSpPr>
             <a:spLocks noGrp="1" noRot="1" noChangeAspect="1"/>
           </p:cNvSpPr>
@@ -936,13 +1411,7 @@
       </p:sp>
       <p:sp>
         <p:nvSpPr>
-          <p:cNvPr id="3" name="슬라이드 노트 개체 틀 2">
-            <a:extLst>
-              <a:ext uri="{FF2B5EF4-FFF2-40B4-BE49-F238E27FC236}">
-                <a16:creationId xmlns:a16="http://schemas.microsoft.com/office/drawing/2014/main" id="{F2F259CF-8156-0FB2-87BB-C2421F329EA1}"/>
-              </a:ext>
-            </a:extLst>
-          </p:cNvPr>
+          <p:cNvPr id="3" name="슬라이드 노트 개체 틀 2"/>
           <p:cNvSpPr>
             <a:spLocks noGrp="1"/>
           </p:cNvSpPr>
@@ -961,18 +1430,12 @@
       </p:sp>
       <p:sp>
         <p:nvSpPr>
-          <p:cNvPr id="4" name="슬라이드 번호 개체 틀 3">
-            <a:extLst>
-              <a:ext uri="{FF2B5EF4-FFF2-40B4-BE49-F238E27FC236}">
-                <a16:creationId xmlns:a16="http://schemas.microsoft.com/office/drawing/2014/main" id="{5301DD34-5BFE-877A-E657-9B3A6B1B5CDD}"/>
-              </a:ext>
-            </a:extLst>
-          </p:cNvPr>
-          <p:cNvSpPr>
-            <a:spLocks noGrp="1"/>
-          </p:cNvSpPr>
-          <p:nvPr>
-            <p:ph type="sldNum" sz="quarter" idx="10"/>
+          <p:cNvPr id="4" name="슬라이드 번호 개체 틀 3"/>
+          <p:cNvSpPr>
+            <a:spLocks noGrp="1"/>
+          </p:cNvSpPr>
+          <p:nvPr>
+            <p:ph type="sldNum" sz="quarter" idx="5"/>
           </p:nvPr>
         </p:nvSpPr>
         <p:spPr/>
@@ -980,18 +1443,502 @@
           <a:bodyPr/>
           <a:lstStyle/>
           <a:p>
-            <a:fld id="{A0085365-8376-4996-BDD6-F39608FADAF3}" type="slidenum">
+            <a:fld id="{3E35EA20-6519-4513-9EDC-C89C5369BAEC}" type="slidenum">
               <a:rPr lang="ko-KR" altLang="en-US" smtClean="0"/>
-              <a:t>39</a:t>
+              <a:pPr/>
+              <a:t>6</a:t>
             </a:fld>
-            <a:endParaRPr lang="ko-KR" altLang="en-US"/>
+            <a:endParaRPr lang="ko-KR" altLang="en-US" dirty="0"/>
           </a:p>
         </p:txBody>
       </p:sp>
     </p:spTree>
     <p:extLst>
       <p:ext uri="{BB962C8B-B14F-4D97-AF65-F5344CB8AC3E}">
-        <p14:creationId xmlns:p14="http://schemas.microsoft.com/office/powerpoint/2010/main" val="2391645545"/>
+        <p14:creationId xmlns:p14="http://schemas.microsoft.com/office/powerpoint/2010/main" val="3779244794"/>
+      </p:ext>
+    </p:extLst>
+  </p:cSld>
+  <p:clrMapOvr>
+    <a:masterClrMapping/>
+  </p:clrMapOvr>
+</p:notes>
+</file>
+
+<file path=ppt/notesSlides/notesSlide6.xml><?xml version="1.0" encoding="utf-8"?>
+<p:notes xmlns:a="http://schemas.openxmlformats.org/drawingml/2006/main" xmlns:r="http://schemas.openxmlformats.org/officeDocument/2006/relationships" xmlns:p="http://schemas.openxmlformats.org/presentationml/2006/main">
+  <p:cSld>
+    <p:spTree>
+      <p:nvGrpSpPr>
+        <p:cNvPr id="1" name=""/>
+        <p:cNvGrpSpPr/>
+        <p:nvPr/>
+      </p:nvGrpSpPr>
+      <p:grpSpPr>
+        <a:xfrm>
+          <a:off x="0" y="0"/>
+          <a:ext cx="0" cy="0"/>
+          <a:chOff x="0" y="0"/>
+          <a:chExt cx="0" cy="0"/>
+        </a:xfrm>
+      </p:grpSpPr>
+      <p:sp>
+        <p:nvSpPr>
+          <p:cNvPr id="2" name="슬라이드 이미지 개체 틀 1"/>
+          <p:cNvSpPr>
+            <a:spLocks noGrp="1" noRot="1" noChangeAspect="1"/>
+          </p:cNvSpPr>
+          <p:nvPr>
+            <p:ph type="sldImg"/>
+          </p:nvPr>
+        </p:nvSpPr>
+        <p:spPr/>
+      </p:sp>
+      <p:sp>
+        <p:nvSpPr>
+          <p:cNvPr id="3" name="슬라이드 노트 개체 틀 2"/>
+          <p:cNvSpPr>
+            <a:spLocks noGrp="1"/>
+          </p:cNvSpPr>
+          <p:nvPr>
+            <p:ph type="body" idx="1"/>
+          </p:nvPr>
+        </p:nvSpPr>
+        <p:spPr/>
+        <p:txBody>
+          <a:bodyPr/>
+          <a:lstStyle/>
+          <a:p>
+            <a:r>
+              <a:rPr lang="ko-KR" altLang="en-US" dirty="0"/>
+              <a:t>우리는 </a:t>
+            </a:r>
+            <a:r>
+              <a:rPr lang="en-US" altLang="ko-KR" dirty="0" err="1"/>
+              <a:t>colab</a:t>
+            </a:r>
+            <a:r>
+              <a:rPr lang="ko-KR" altLang="en-US" dirty="0"/>
+              <a:t>을 사용할 것</a:t>
+            </a:r>
+          </a:p>
+        </p:txBody>
+      </p:sp>
+      <p:sp>
+        <p:nvSpPr>
+          <p:cNvPr id="4" name="슬라이드 번호 개체 틀 3"/>
+          <p:cNvSpPr>
+            <a:spLocks noGrp="1"/>
+          </p:cNvSpPr>
+          <p:nvPr>
+            <p:ph type="sldNum" sz="quarter" idx="5"/>
+          </p:nvPr>
+        </p:nvSpPr>
+        <p:spPr/>
+        <p:txBody>
+          <a:bodyPr/>
+          <a:lstStyle/>
+          <a:p>
+            <a:fld id="{3E35EA20-6519-4513-9EDC-C89C5369BAEC}" type="slidenum">
+              <a:rPr lang="ko-KR" altLang="en-US" smtClean="0"/>
+              <a:pPr/>
+              <a:t>7</a:t>
+            </a:fld>
+            <a:endParaRPr lang="ko-KR" altLang="en-US" dirty="0"/>
+          </a:p>
+        </p:txBody>
+      </p:sp>
+    </p:spTree>
+    <p:extLst>
+      <p:ext uri="{BB962C8B-B14F-4D97-AF65-F5344CB8AC3E}">
+        <p14:creationId xmlns:p14="http://schemas.microsoft.com/office/powerpoint/2010/main" val="151967523"/>
+      </p:ext>
+    </p:extLst>
+  </p:cSld>
+  <p:clrMapOvr>
+    <a:masterClrMapping/>
+  </p:clrMapOvr>
+</p:notes>
+</file>
+
+<file path=ppt/notesSlides/notesSlide7.xml><?xml version="1.0" encoding="utf-8"?>
+<p:notes xmlns:a="http://schemas.openxmlformats.org/drawingml/2006/main" xmlns:r="http://schemas.openxmlformats.org/officeDocument/2006/relationships" xmlns:p="http://schemas.openxmlformats.org/presentationml/2006/main">
+  <p:cSld>
+    <p:spTree>
+      <p:nvGrpSpPr>
+        <p:cNvPr id="1" name=""/>
+        <p:cNvGrpSpPr/>
+        <p:nvPr/>
+      </p:nvGrpSpPr>
+      <p:grpSpPr>
+        <a:xfrm>
+          <a:off x="0" y="0"/>
+          <a:ext cx="0" cy="0"/>
+          <a:chOff x="0" y="0"/>
+          <a:chExt cx="0" cy="0"/>
+        </a:xfrm>
+      </p:grpSpPr>
+      <p:sp>
+        <p:nvSpPr>
+          <p:cNvPr id="2" name="슬라이드 이미지 개체 틀 1"/>
+          <p:cNvSpPr>
+            <a:spLocks noGrp="1" noRot="1" noChangeAspect="1"/>
+          </p:cNvSpPr>
+          <p:nvPr>
+            <p:ph type="sldImg"/>
+          </p:nvPr>
+        </p:nvSpPr>
+        <p:spPr/>
+      </p:sp>
+      <p:sp>
+        <p:nvSpPr>
+          <p:cNvPr id="3" name="슬라이드 노트 개체 틀 2"/>
+          <p:cNvSpPr>
+            <a:spLocks noGrp="1"/>
+          </p:cNvSpPr>
+          <p:nvPr>
+            <p:ph type="body" idx="1"/>
+          </p:nvPr>
+        </p:nvSpPr>
+        <p:spPr/>
+        <p:txBody>
+          <a:bodyPr/>
+          <a:lstStyle/>
+          <a:p>
+            <a:endParaRPr lang="ko-KR" altLang="en-US" dirty="0"/>
+          </a:p>
+        </p:txBody>
+      </p:sp>
+      <p:sp>
+        <p:nvSpPr>
+          <p:cNvPr id="4" name="슬라이드 번호 개체 틀 3"/>
+          <p:cNvSpPr>
+            <a:spLocks noGrp="1"/>
+          </p:cNvSpPr>
+          <p:nvPr>
+            <p:ph type="sldNum" sz="quarter" idx="5"/>
+          </p:nvPr>
+        </p:nvSpPr>
+        <p:spPr/>
+        <p:txBody>
+          <a:bodyPr/>
+          <a:lstStyle/>
+          <a:p>
+            <a:fld id="{3E35EA20-6519-4513-9EDC-C89C5369BAEC}" type="slidenum">
+              <a:rPr lang="ko-KR" altLang="en-US" smtClean="0"/>
+              <a:pPr/>
+              <a:t>10</a:t>
+            </a:fld>
+            <a:endParaRPr lang="ko-KR" altLang="en-US" dirty="0"/>
+          </a:p>
+        </p:txBody>
+      </p:sp>
+    </p:spTree>
+    <p:extLst>
+      <p:ext uri="{BB962C8B-B14F-4D97-AF65-F5344CB8AC3E}">
+        <p14:creationId xmlns:p14="http://schemas.microsoft.com/office/powerpoint/2010/main" val="977512435"/>
+      </p:ext>
+    </p:extLst>
+  </p:cSld>
+  <p:clrMapOvr>
+    <a:masterClrMapping/>
+  </p:clrMapOvr>
+</p:notes>
+</file>
+
+<file path=ppt/notesSlides/notesSlide8.xml><?xml version="1.0" encoding="utf-8"?>
+<p:notes xmlns:a="http://schemas.openxmlformats.org/drawingml/2006/main" xmlns:r="http://schemas.openxmlformats.org/officeDocument/2006/relationships" xmlns:p="http://schemas.openxmlformats.org/presentationml/2006/main">
+  <p:cSld>
+    <p:spTree>
+      <p:nvGrpSpPr>
+        <p:cNvPr id="1" name=""/>
+        <p:cNvGrpSpPr/>
+        <p:nvPr/>
+      </p:nvGrpSpPr>
+      <p:grpSpPr>
+        <a:xfrm>
+          <a:off x="0" y="0"/>
+          <a:ext cx="0" cy="0"/>
+          <a:chOff x="0" y="0"/>
+          <a:chExt cx="0" cy="0"/>
+        </a:xfrm>
+      </p:grpSpPr>
+      <p:sp>
+        <p:nvSpPr>
+          <p:cNvPr id="2" name="슬라이드 이미지 개체 틀 1"/>
+          <p:cNvSpPr>
+            <a:spLocks noGrp="1" noRot="1" noChangeAspect="1"/>
+          </p:cNvSpPr>
+          <p:nvPr>
+            <p:ph type="sldImg"/>
+          </p:nvPr>
+        </p:nvSpPr>
+        <p:spPr/>
+      </p:sp>
+      <p:sp>
+        <p:nvSpPr>
+          <p:cNvPr id="3" name="슬라이드 노트 개체 틀 2"/>
+          <p:cNvSpPr>
+            <a:spLocks noGrp="1"/>
+          </p:cNvSpPr>
+          <p:nvPr>
+            <p:ph type="body" idx="1"/>
+          </p:nvPr>
+        </p:nvSpPr>
+        <p:spPr/>
+        <p:txBody>
+          <a:bodyPr/>
+          <a:lstStyle/>
+          <a:p>
+            <a:r>
+              <a:rPr lang="ko-KR" altLang="en-US" dirty="0"/>
+              <a:t>앞에서 배운</a:t>
+            </a:r>
+            <a:br>
+              <a:rPr lang="ko-KR" altLang="en-US" dirty="0"/>
+            </a:br>
+            <a:r>
+              <a:rPr lang="en-US" altLang="ko-KR" dirty="0"/>
+              <a:t>Lag, Rolling </a:t>
+            </a:r>
+            <a:r>
+              <a:rPr lang="ko-KR" altLang="en-US" dirty="0"/>
+              <a:t>같은 피처들은</a:t>
+            </a:r>
+            <a:br>
+              <a:rPr lang="ko-KR" altLang="en-US" dirty="0"/>
+            </a:br>
+            <a:r>
+              <a:rPr lang="ko-KR" altLang="en-US" dirty="0"/>
+              <a:t>결국 전부 </a:t>
+            </a:r>
+            <a:r>
+              <a:rPr lang="en-US" altLang="ko-KR" b="1" dirty="0"/>
+              <a:t>Tensor </a:t>
+            </a:r>
+            <a:r>
+              <a:rPr lang="ko-KR" altLang="en-US" b="1" dirty="0"/>
+              <a:t>형태로 모델에 들어갑니다</a:t>
+            </a:r>
+            <a:r>
+              <a:rPr lang="en-US" altLang="ko-KR" b="1" dirty="0"/>
+              <a:t>.</a:t>
+            </a:r>
+          </a:p>
+          <a:p>
+            <a:endParaRPr lang="en-US" altLang="ko-KR" b="1" dirty="0"/>
+          </a:p>
+          <a:p>
+            <a:r>
+              <a:rPr lang="ko-KR" altLang="en-US" dirty="0"/>
+              <a:t>“</a:t>
+            </a:r>
+            <a:r>
+              <a:rPr lang="en-US" altLang="ko-KR" dirty="0"/>
+              <a:t>Tensor</a:t>
+            </a:r>
+            <a:r>
+              <a:rPr lang="ko-KR" altLang="en-US" dirty="0"/>
+              <a:t>는</a:t>
+            </a:r>
+            <a:br>
+              <a:rPr lang="ko-KR" altLang="en-US" dirty="0"/>
+            </a:br>
+            <a:r>
+              <a:rPr lang="ko-KR" altLang="en-US" dirty="0"/>
+              <a:t>우리가 만들었던 데이터 표를</a:t>
+            </a:r>
+            <a:br>
+              <a:rPr lang="ko-KR" altLang="en-US" dirty="0"/>
+            </a:br>
+            <a:r>
+              <a:rPr lang="ko-KR" altLang="en-US" b="1" dirty="0"/>
+              <a:t>계산하기 좋게 바꾼 상자</a:t>
+            </a:r>
+            <a:r>
+              <a:rPr lang="ko-KR" altLang="en-US" dirty="0"/>
+              <a:t>입니다</a:t>
+            </a:r>
+            <a:r>
+              <a:rPr lang="en-US" altLang="ko-KR" dirty="0"/>
+              <a:t>.”</a:t>
+            </a:r>
+          </a:p>
+          <a:p>
+            <a:r>
+              <a:rPr lang="en-US" altLang="ko-KR" dirty="0"/>
+              <a:t>“Lag 1, Lag 2, Rolling </a:t>
+            </a:r>
+            <a:r>
+              <a:rPr lang="ko-KR" altLang="en-US" dirty="0"/>
+              <a:t>평균</a:t>
+            </a:r>
+            <a:r>
+              <a:rPr lang="en-US" altLang="ko-KR" dirty="0"/>
+              <a:t>…</a:t>
+            </a:r>
+            <a:br>
+              <a:rPr lang="en-US" altLang="ko-KR" dirty="0"/>
+            </a:br>
+            <a:r>
+              <a:rPr lang="ko-KR" altLang="en-US" dirty="0"/>
+              <a:t>이 모든 게 결국</a:t>
+            </a:r>
+            <a:br>
+              <a:rPr lang="ko-KR" altLang="en-US" dirty="0"/>
+            </a:br>
+            <a:r>
+              <a:rPr lang="ko-KR" altLang="en-US" dirty="0"/>
+              <a:t>하나의 </a:t>
+            </a:r>
+            <a:r>
+              <a:rPr lang="en-US" altLang="ko-KR" dirty="0"/>
+              <a:t>Tensor </a:t>
+            </a:r>
+            <a:r>
+              <a:rPr lang="ko-KR" altLang="en-US" dirty="0"/>
+              <a:t>묶음으로 들어갑니다</a:t>
+            </a:r>
+            <a:r>
+              <a:rPr lang="en-US" altLang="ko-KR" dirty="0"/>
+              <a:t>.”</a:t>
+            </a:r>
+          </a:p>
+          <a:p>
+            <a:r>
+              <a:rPr lang="ko-KR" altLang="en-US" dirty="0"/>
+              <a:t>👉 </a:t>
+            </a:r>
+            <a:r>
+              <a:rPr lang="en-US" altLang="ko-KR" dirty="0"/>
+              <a:t>Tensor = </a:t>
+            </a:r>
+            <a:r>
+              <a:rPr lang="ko-KR" altLang="en-US" b="1" dirty="0"/>
+              <a:t>데이터 컨테이너</a:t>
+            </a:r>
+            <a:endParaRPr lang="ko-KR" altLang="en-US" dirty="0"/>
+          </a:p>
+          <a:p>
+            <a:endParaRPr lang="ko-KR" altLang="en-US"/>
+          </a:p>
+          <a:p>
+            <a:endParaRPr lang="ko-KR" altLang="en-US" dirty="0"/>
+          </a:p>
+        </p:txBody>
+      </p:sp>
+      <p:sp>
+        <p:nvSpPr>
+          <p:cNvPr id="4" name="슬라이드 번호 개체 틀 3"/>
+          <p:cNvSpPr>
+            <a:spLocks noGrp="1"/>
+          </p:cNvSpPr>
+          <p:nvPr>
+            <p:ph type="sldNum" sz="quarter" idx="5"/>
+          </p:nvPr>
+        </p:nvSpPr>
+        <p:spPr/>
+        <p:txBody>
+          <a:bodyPr/>
+          <a:lstStyle/>
+          <a:p>
+            <a:fld id="{3E35EA20-6519-4513-9EDC-C89C5369BAEC}" type="slidenum">
+              <a:rPr lang="ko-KR" altLang="en-US" smtClean="0"/>
+              <a:pPr/>
+              <a:t>11</a:t>
+            </a:fld>
+            <a:endParaRPr lang="ko-KR" altLang="en-US" dirty="0"/>
+          </a:p>
+        </p:txBody>
+      </p:sp>
+    </p:spTree>
+    <p:extLst>
+      <p:ext uri="{BB962C8B-B14F-4D97-AF65-F5344CB8AC3E}">
+        <p14:creationId xmlns:p14="http://schemas.microsoft.com/office/powerpoint/2010/main" val="1994786297"/>
+      </p:ext>
+    </p:extLst>
+  </p:cSld>
+  <p:clrMapOvr>
+    <a:masterClrMapping/>
+  </p:clrMapOvr>
+</p:notes>
+</file>
+
+<file path=ppt/notesSlides/notesSlide9.xml><?xml version="1.0" encoding="utf-8"?>
+<p:notes xmlns:a="http://schemas.openxmlformats.org/drawingml/2006/main" xmlns:r="http://schemas.openxmlformats.org/officeDocument/2006/relationships" xmlns:p="http://schemas.openxmlformats.org/presentationml/2006/main">
+  <p:cSld>
+    <p:spTree>
+      <p:nvGrpSpPr>
+        <p:cNvPr id="1" name=""/>
+        <p:cNvGrpSpPr/>
+        <p:nvPr/>
+      </p:nvGrpSpPr>
+      <p:grpSpPr>
+        <a:xfrm>
+          <a:off x="0" y="0"/>
+          <a:ext cx="0" cy="0"/>
+          <a:chOff x="0" y="0"/>
+          <a:chExt cx="0" cy="0"/>
+        </a:xfrm>
+      </p:grpSpPr>
+      <p:sp>
+        <p:nvSpPr>
+          <p:cNvPr id="2" name="슬라이드 이미지 개체 틀 1"/>
+          <p:cNvSpPr>
+            <a:spLocks noGrp="1" noRot="1" noChangeAspect="1"/>
+          </p:cNvSpPr>
+          <p:nvPr>
+            <p:ph type="sldImg"/>
+          </p:nvPr>
+        </p:nvSpPr>
+        <p:spPr/>
+      </p:sp>
+      <p:sp>
+        <p:nvSpPr>
+          <p:cNvPr id="3" name="슬라이드 노트 개체 틀 2"/>
+          <p:cNvSpPr>
+            <a:spLocks noGrp="1"/>
+          </p:cNvSpPr>
+          <p:nvPr>
+            <p:ph type="body" idx="1"/>
+          </p:nvPr>
+        </p:nvSpPr>
+        <p:spPr/>
+        <p:txBody>
+          <a:bodyPr/>
+          <a:lstStyle/>
+          <a:p>
+            <a:endParaRPr lang="ko-KR" altLang="en-US" dirty="0"/>
+          </a:p>
+        </p:txBody>
+      </p:sp>
+      <p:sp>
+        <p:nvSpPr>
+          <p:cNvPr id="4" name="슬라이드 번호 개체 틀 3"/>
+          <p:cNvSpPr>
+            <a:spLocks noGrp="1"/>
+          </p:cNvSpPr>
+          <p:nvPr>
+            <p:ph type="sldNum" sz="quarter" idx="5"/>
+          </p:nvPr>
+        </p:nvSpPr>
+        <p:spPr/>
+        <p:txBody>
+          <a:bodyPr/>
+          <a:lstStyle/>
+          <a:p>
+            <a:fld id="{C09E5BFC-1559-42F1-8940-AB342D56BF02}" type="slidenum">
+              <a:rPr lang="ko-KR" altLang="en-US" smtClean="0"/>
+              <a:t>12</a:t>
+            </a:fld>
+            <a:endParaRPr lang="ko-KR" altLang="en-US"/>
+          </a:p>
+        </p:txBody>
+      </p:sp>
+    </p:spTree>
+    <p:extLst>
+      <p:ext uri="{BB962C8B-B14F-4D97-AF65-F5344CB8AC3E}">
+        <p14:creationId xmlns:p14="http://schemas.microsoft.com/office/powerpoint/2010/main" val="3589031296"/>
       </p:ext>
     </p:extLst>
   </p:cSld>
@@ -1148,7 +2095,7 @@
           <a:p>
             <a:fld id="{442BEE3F-2E9A-4FD8-8B8A-8619F3E161C0}" type="datetime1">
               <a:rPr lang="ko-KR" altLang="en-US" smtClean="0"/>
-              <a:t>2025-09-11</a:t>
+              <a:t>2026-02-10</a:t>
             </a:fld>
             <a:endParaRPr lang="ko-KR" altLang="en-US"/>
           </a:p>
@@ -1435,7 +2382,7 @@
           <a:p>
             <a:fld id="{0F78D9C4-20C1-4B15-A116-16DC77AD9A1E}" type="datetime1">
               <a:rPr lang="ko-KR" altLang="en-US" smtClean="0"/>
-              <a:t>2025-09-11</a:t>
+              <a:t>2026-02-10</a:t>
             </a:fld>
             <a:endParaRPr lang="ko-KR" altLang="en-US"/>
           </a:p>
@@ -1610,7 +2557,7 @@
           <a:p>
             <a:fld id="{7F5E23C3-0E3D-4E4E-8486-D7FB4C073DC1}" type="datetime1">
               <a:rPr lang="ko-KR" altLang="en-US" smtClean="0"/>
-              <a:t>2025-09-11</a:t>
+              <a:t>2026-02-10</a:t>
             </a:fld>
             <a:endParaRPr lang="ko-KR" altLang="en-US"/>
           </a:p>
@@ -1939,7 +2886,7 @@
           <a:p>
             <a:fld id="{7F5E23C3-0E3D-4E4E-8486-D7FB4C073DC1}" type="datetime1">
               <a:rPr lang="ko-KR" altLang="en-US" smtClean="0"/>
-              <a:t>2025-09-11</a:t>
+              <a:t>2026-02-10</a:t>
             </a:fld>
             <a:endParaRPr lang="ko-KR" altLang="en-US"/>
           </a:p>
@@ -2461,105 +3408,6 @@
           </a:p>
         </p:txBody>
       </p:sp>
-      <p:sp>
-        <p:nvSpPr>
-          <p:cNvPr id="3" name="부제목 2">
-            <a:extLst>
-              <a:ext uri="{FF2B5EF4-FFF2-40B4-BE49-F238E27FC236}">
-                <a16:creationId xmlns:a16="http://schemas.microsoft.com/office/drawing/2014/main" id="{5F9E2036-8D3D-3C48-304C-6615D19E477C}"/>
-              </a:ext>
-            </a:extLst>
-          </p:cNvPr>
-          <p:cNvSpPr>
-            <a:spLocks noGrp="1"/>
-          </p:cNvSpPr>
-          <p:nvPr>
-            <p:ph type="subTitle" idx="1"/>
-          </p:nvPr>
-        </p:nvSpPr>
-        <p:spPr>
-          <a:xfrm>
-            <a:off x="6375349" y="3686684"/>
-            <a:ext cx="2336503" cy="530087"/>
-          </a:xfrm>
-        </p:spPr>
-        <p:txBody>
-          <a:bodyPr wrap="square"/>
-          <a:lstStyle/>
-          <a:p>
-            <a:pPr algn="just"/>
-            <a:r>
-              <a:rPr lang="ko-KR" altLang="en-US" b="1" dirty="0">
-                <a:solidFill>
-                  <a:srgbClr val="2B2B2B"/>
-                </a:solidFill>
-                <a:latin typeface="G마켓 산스 TTF Bold" panose="02000000000000000000" pitchFamily="2" charset="-127"/>
-                <a:ea typeface="G마켓 산스 TTF Bold" panose="02000000000000000000" pitchFamily="2" charset="-127"/>
-                <a:cs typeface="Pretendard SemiBold" panose="02000703000000020004" pitchFamily="2" charset="-127"/>
-              </a:rPr>
-              <a:t>재생에너지 </a:t>
-            </a:r>
-            <a:r>
-              <a:rPr lang="en-US" altLang="ko-KR" b="1" dirty="0">
-                <a:solidFill>
-                  <a:srgbClr val="2B2B2B"/>
-                </a:solidFill>
-                <a:latin typeface="G마켓 산스 TTF Bold" panose="02000000000000000000" pitchFamily="2" charset="-127"/>
-                <a:ea typeface="G마켓 산스 TTF Bold" panose="02000000000000000000" pitchFamily="2" charset="-127"/>
-                <a:cs typeface="Pretendard SemiBold" panose="02000703000000020004" pitchFamily="2" charset="-127"/>
-              </a:rPr>
-              <a:t>3</a:t>
-            </a:r>
-            <a:r>
-              <a:rPr lang="ko-KR" altLang="en-US" b="1" dirty="0">
-                <a:solidFill>
-                  <a:srgbClr val="2B2B2B"/>
-                </a:solidFill>
-                <a:latin typeface="G마켓 산스 TTF Bold" panose="02000000000000000000" pitchFamily="2" charset="-127"/>
-                <a:ea typeface="G마켓 산스 TTF Bold" panose="02000000000000000000" pitchFamily="2" charset="-127"/>
-                <a:cs typeface="Pretendard SemiBold" panose="02000703000000020004" pitchFamily="2" charset="-127"/>
-              </a:rPr>
-              <a:t>기</a:t>
-            </a:r>
-          </a:p>
-        </p:txBody>
-      </p:sp>
-      <p:pic>
-        <p:nvPicPr>
-          <p:cNvPr id="4" name="그림 3">
-            <a:extLst>
-              <a:ext uri="{FF2B5EF4-FFF2-40B4-BE49-F238E27FC236}">
-                <a16:creationId xmlns:a16="http://schemas.microsoft.com/office/drawing/2014/main" id="{73AD1B1D-CD7D-EE4E-41B0-87A1CCAAD46F}"/>
-              </a:ext>
-            </a:extLst>
-          </p:cNvPr>
-          <p:cNvPicPr>
-            <a:picLocks noChangeAspect="1"/>
-          </p:cNvPicPr>
-          <p:nvPr/>
-        </p:nvPicPr>
-        <p:blipFill>
-          <a:blip r:embed="rId3">
-            <a:extLst>
-              <a:ext uri="{28A0092B-C50C-407E-A947-70E740481C1C}">
-                <a14:useLocalDpi xmlns:a14="http://schemas.microsoft.com/office/drawing/2010/main" val="0"/>
-              </a:ext>
-            </a:extLst>
-          </a:blip>
-          <a:stretch>
-            <a:fillRect/>
-          </a:stretch>
-        </p:blipFill>
-        <p:spPr>
-          <a:xfrm>
-            <a:off x="3229511" y="3670957"/>
-            <a:ext cx="3021223" cy="456225"/>
-          </a:xfrm>
-          <a:prstGeom prst="rect">
-            <a:avLst/>
-          </a:prstGeom>
-        </p:spPr>
-      </p:pic>
       <p:grpSp>
         <p:nvGrpSpPr>
           <p:cNvPr id="5" name="그룹 4">
@@ -2595,7 +3443,7 @@
             <p:nvPr/>
           </p:nvPicPr>
           <p:blipFill>
-            <a:blip r:embed="rId4">
+            <a:blip r:embed="rId3">
               <a:extLst>
                 <a:ext uri="{28A0092B-C50C-407E-A947-70E740481C1C}">
                   <a14:useLocalDpi xmlns:a14="http://schemas.microsoft.com/office/drawing/2010/main" val="0"/>
@@ -2631,7 +3479,7 @@
             <p:nvPr/>
           </p:nvPicPr>
           <p:blipFill>
-            <a:blip r:embed="rId5" cstate="print">
+            <a:blip r:embed="rId4" cstate="print">
               <a:extLst>
                 <a:ext uri="{28A0092B-C50C-407E-A947-70E740481C1C}">
                   <a14:useLocalDpi xmlns:a14="http://schemas.microsoft.com/office/drawing/2010/main" val="0"/>
@@ -2653,10 +3501,275 @@
           </p:spPr>
         </p:pic>
       </p:grpSp>
+      <p:sp>
+        <p:nvSpPr>
+          <p:cNvPr id="8" name="부제목 2">
+            <a:extLst>
+              <a:ext uri="{FF2B5EF4-FFF2-40B4-BE49-F238E27FC236}">
+                <a16:creationId xmlns:a16="http://schemas.microsoft.com/office/drawing/2014/main" id="{DB4B2667-B3F4-F4E7-4A87-A3477312E2B1}"/>
+              </a:ext>
+            </a:extLst>
+          </p:cNvPr>
+          <p:cNvSpPr txBox="1">
+            <a:spLocks/>
+          </p:cNvSpPr>
+          <p:nvPr/>
+        </p:nvSpPr>
+        <p:spPr>
+          <a:xfrm>
+            <a:off x="5194406" y="3686684"/>
+            <a:ext cx="4316585" cy="530087"/>
+          </a:xfrm>
+          <a:prstGeom prst="rect">
+            <a:avLst/>
+          </a:prstGeom>
+        </p:spPr>
+        <p:txBody>
+          <a:bodyPr vert="horz" wrap="square" lIns="91440" tIns="45720" rIns="91440" bIns="45720" rtlCol="0">
+            <a:normAutofit fontScale="85000" lnSpcReduction="10000"/>
+          </a:bodyPr>
+          <a:lstStyle>
+            <a:lvl1pPr marL="0" indent="0" algn="ctr" defTabSz="914400" rtl="0" eaLnBrk="1" latinLnBrk="1" hangingPunct="1">
+              <a:lnSpc>
+                <a:spcPct val="90000"/>
+              </a:lnSpc>
+              <a:spcBef>
+                <a:spcPts val="1000"/>
+              </a:spcBef>
+              <a:buFont typeface="Arial" panose="020B0604020202020204" pitchFamily="34" charset="0"/>
+              <a:buNone/>
+              <a:defRPr sz="2400" kern="1200">
+                <a:solidFill>
+                  <a:schemeClr val="tx1"/>
+                </a:solidFill>
+                <a:latin typeface="Pretendard Medium" panose="02000603000000020004" pitchFamily="2" charset="-127"/>
+                <a:ea typeface="Pretendard Medium" panose="02000603000000020004" pitchFamily="2" charset="-127"/>
+                <a:cs typeface="Pretendard Medium" panose="02000603000000020004" pitchFamily="2" charset="-127"/>
+              </a:defRPr>
+            </a:lvl1pPr>
+            <a:lvl2pPr marL="457200" indent="0" algn="ctr" defTabSz="914400" rtl="0" eaLnBrk="1" latinLnBrk="1" hangingPunct="1">
+              <a:lnSpc>
+                <a:spcPct val="90000"/>
+              </a:lnSpc>
+              <a:spcBef>
+                <a:spcPts val="500"/>
+              </a:spcBef>
+              <a:buFont typeface="Arial" panose="020B0604020202020204" pitchFamily="34" charset="0"/>
+              <a:buNone/>
+              <a:defRPr sz="2000" kern="1200">
+                <a:solidFill>
+                  <a:schemeClr val="tx1"/>
+                </a:solidFill>
+                <a:latin typeface="Pretendard Light" panose="02000403000000020004" pitchFamily="2" charset="-127"/>
+                <a:ea typeface="Pretendard Light" panose="02000403000000020004" pitchFamily="2" charset="-127"/>
+                <a:cs typeface="Pretendard Light" panose="02000403000000020004" pitchFamily="2" charset="-127"/>
+              </a:defRPr>
+            </a:lvl2pPr>
+            <a:lvl3pPr marL="914400" indent="0" algn="ctr" defTabSz="914400" rtl="0" eaLnBrk="1" latinLnBrk="1" hangingPunct="1">
+              <a:lnSpc>
+                <a:spcPct val="90000"/>
+              </a:lnSpc>
+              <a:spcBef>
+                <a:spcPts val="500"/>
+              </a:spcBef>
+              <a:buFont typeface="Arial" panose="020B0604020202020204" pitchFamily="34" charset="0"/>
+              <a:buNone/>
+              <a:defRPr sz="1800" kern="1200">
+                <a:solidFill>
+                  <a:schemeClr val="tx1"/>
+                </a:solidFill>
+                <a:latin typeface="Pretendard Light" panose="02000403000000020004" pitchFamily="2" charset="-127"/>
+                <a:ea typeface="Pretendard Light" panose="02000403000000020004" pitchFamily="2" charset="-127"/>
+                <a:cs typeface="Pretendard Light" panose="02000403000000020004" pitchFamily="2" charset="-127"/>
+              </a:defRPr>
+            </a:lvl3pPr>
+            <a:lvl4pPr marL="1371600" indent="0" algn="ctr" defTabSz="914400" rtl="0" eaLnBrk="1" latinLnBrk="1" hangingPunct="1">
+              <a:lnSpc>
+                <a:spcPct val="90000"/>
+              </a:lnSpc>
+              <a:spcBef>
+                <a:spcPts val="500"/>
+              </a:spcBef>
+              <a:buFont typeface="Arial" panose="020B0604020202020204" pitchFamily="34" charset="0"/>
+              <a:buNone/>
+              <a:defRPr sz="1600" kern="1200">
+                <a:solidFill>
+                  <a:schemeClr val="tx1"/>
+                </a:solidFill>
+                <a:latin typeface="Pretendard Light" panose="02000403000000020004" pitchFamily="2" charset="-127"/>
+                <a:ea typeface="Pretendard Light" panose="02000403000000020004" pitchFamily="2" charset="-127"/>
+                <a:cs typeface="Pretendard Light" panose="02000403000000020004" pitchFamily="2" charset="-127"/>
+              </a:defRPr>
+            </a:lvl4pPr>
+            <a:lvl5pPr marL="1828800" indent="0" algn="ctr" defTabSz="914400" rtl="0" eaLnBrk="1" latinLnBrk="1" hangingPunct="1">
+              <a:lnSpc>
+                <a:spcPct val="90000"/>
+              </a:lnSpc>
+              <a:spcBef>
+                <a:spcPts val="500"/>
+              </a:spcBef>
+              <a:buFont typeface="Arial" panose="020B0604020202020204" pitchFamily="34" charset="0"/>
+              <a:buNone/>
+              <a:defRPr sz="1600" kern="1200">
+                <a:solidFill>
+                  <a:schemeClr val="tx1"/>
+                </a:solidFill>
+                <a:latin typeface="Pretendard Light" panose="02000403000000020004" pitchFamily="2" charset="-127"/>
+                <a:ea typeface="Pretendard Light" panose="02000403000000020004" pitchFamily="2" charset="-127"/>
+                <a:cs typeface="Pretendard Light" panose="02000403000000020004" pitchFamily="2" charset="-127"/>
+              </a:defRPr>
+            </a:lvl5pPr>
+            <a:lvl6pPr marL="2286000" indent="0" algn="ctr" defTabSz="914400" rtl="0" eaLnBrk="1" latinLnBrk="1" hangingPunct="1">
+              <a:lnSpc>
+                <a:spcPct val="90000"/>
+              </a:lnSpc>
+              <a:spcBef>
+                <a:spcPts val="500"/>
+              </a:spcBef>
+              <a:buFont typeface="Arial" panose="020B0604020202020204" pitchFamily="34" charset="0"/>
+              <a:buNone/>
+              <a:defRPr sz="1600" kern="1200">
+                <a:solidFill>
+                  <a:schemeClr val="tx1"/>
+                </a:solidFill>
+                <a:latin typeface="+mn-lt"/>
+                <a:ea typeface="+mn-ea"/>
+                <a:cs typeface="+mn-cs"/>
+              </a:defRPr>
+            </a:lvl6pPr>
+            <a:lvl7pPr marL="2743200" indent="0" algn="ctr" defTabSz="914400" rtl="0" eaLnBrk="1" latinLnBrk="1" hangingPunct="1">
+              <a:lnSpc>
+                <a:spcPct val="90000"/>
+              </a:lnSpc>
+              <a:spcBef>
+                <a:spcPts val="500"/>
+              </a:spcBef>
+              <a:buFont typeface="Arial" panose="020B0604020202020204" pitchFamily="34" charset="0"/>
+              <a:buNone/>
+              <a:defRPr sz="1600" kern="1200">
+                <a:solidFill>
+                  <a:schemeClr val="tx1"/>
+                </a:solidFill>
+                <a:latin typeface="+mn-lt"/>
+                <a:ea typeface="+mn-ea"/>
+                <a:cs typeface="+mn-cs"/>
+              </a:defRPr>
+            </a:lvl7pPr>
+            <a:lvl8pPr marL="3200400" indent="0" algn="ctr" defTabSz="914400" rtl="0" eaLnBrk="1" latinLnBrk="1" hangingPunct="1">
+              <a:lnSpc>
+                <a:spcPct val="90000"/>
+              </a:lnSpc>
+              <a:spcBef>
+                <a:spcPts val="500"/>
+              </a:spcBef>
+              <a:buFont typeface="Arial" panose="020B0604020202020204" pitchFamily="34" charset="0"/>
+              <a:buNone/>
+              <a:defRPr sz="1600" kern="1200">
+                <a:solidFill>
+                  <a:schemeClr val="tx1"/>
+                </a:solidFill>
+                <a:latin typeface="+mn-lt"/>
+                <a:ea typeface="+mn-ea"/>
+                <a:cs typeface="+mn-cs"/>
+              </a:defRPr>
+            </a:lvl8pPr>
+            <a:lvl9pPr marL="3657600" indent="0" algn="ctr" defTabSz="914400" rtl="0" eaLnBrk="1" latinLnBrk="1" hangingPunct="1">
+              <a:lnSpc>
+                <a:spcPct val="90000"/>
+              </a:lnSpc>
+              <a:spcBef>
+                <a:spcPts val="500"/>
+              </a:spcBef>
+              <a:buFont typeface="Arial" panose="020B0604020202020204" pitchFamily="34" charset="0"/>
+              <a:buNone/>
+              <a:defRPr sz="1600" kern="1200">
+                <a:solidFill>
+                  <a:schemeClr val="tx1"/>
+                </a:solidFill>
+                <a:latin typeface="+mn-lt"/>
+                <a:ea typeface="+mn-ea"/>
+                <a:cs typeface="+mn-cs"/>
+              </a:defRPr>
+            </a:lvl9pPr>
+          </a:lstStyle>
+          <a:p>
+            <a:pPr algn="just"/>
+            <a:r>
+              <a:rPr lang="ko-KR" altLang="en-US" b="1" dirty="0">
+                <a:solidFill>
+                  <a:srgbClr val="2B2B2B"/>
+                </a:solidFill>
+                <a:latin typeface="G마켓 산스 TTF Bold" panose="02000000000000000000" pitchFamily="2" charset="-127"/>
+                <a:ea typeface="G마켓 산스 TTF Bold" panose="02000000000000000000" pitchFamily="2" charset="-127"/>
+                <a:cs typeface="Pretendard SemiBold" panose="02000703000000020004" pitchFamily="2" charset="-127"/>
+              </a:rPr>
+              <a:t>신재생에너지 </a:t>
+            </a:r>
+            <a:r>
+              <a:rPr lang="en-US" altLang="ko-KR" b="1" dirty="0">
+                <a:solidFill>
+                  <a:srgbClr val="2B2B2B"/>
+                </a:solidFill>
+                <a:latin typeface="G마켓 산스 TTF Bold" panose="02000000000000000000" pitchFamily="2" charset="-127"/>
+                <a:ea typeface="G마켓 산스 TTF Bold" panose="02000000000000000000" pitchFamily="2" charset="-127"/>
+                <a:cs typeface="Pretendard SemiBold" panose="02000703000000020004" pitchFamily="2" charset="-127"/>
+              </a:rPr>
+              <a:t>IoT </a:t>
+            </a:r>
+            <a:r>
+              <a:rPr lang="ko-KR" altLang="en-US" b="1" dirty="0">
+                <a:solidFill>
+                  <a:srgbClr val="2B2B2B"/>
+                </a:solidFill>
+                <a:latin typeface="G마켓 산스 TTF Bold" panose="02000000000000000000" pitchFamily="2" charset="-127"/>
+                <a:ea typeface="G마켓 산스 TTF Bold" panose="02000000000000000000" pitchFamily="2" charset="-127"/>
+                <a:cs typeface="Pretendard SemiBold" panose="02000703000000020004" pitchFamily="2" charset="-127"/>
+              </a:rPr>
+              <a:t>개발자 입문 과정</a:t>
+            </a:r>
+          </a:p>
+        </p:txBody>
+      </p:sp>
+      <p:pic>
+        <p:nvPicPr>
+          <p:cNvPr id="11" name="그림 10">
+            <a:extLst>
+              <a:ext uri="{FF2B5EF4-FFF2-40B4-BE49-F238E27FC236}">
+                <a16:creationId xmlns:a16="http://schemas.microsoft.com/office/drawing/2014/main" id="{43B0D367-DE04-26A9-6CB6-502ED4BB2FD3}"/>
+              </a:ext>
+            </a:extLst>
+          </p:cNvPr>
+          <p:cNvPicPr>
+            <a:picLocks noChangeAspect="1"/>
+          </p:cNvPicPr>
+          <p:nvPr/>
+        </p:nvPicPr>
+        <p:blipFill>
+          <a:blip r:embed="rId5">
+            <a:extLst>
+              <a:ext uri="{28A0092B-C50C-407E-A947-70E740481C1C}">
+                <a14:useLocalDpi xmlns:a14="http://schemas.microsoft.com/office/drawing/2010/main" val="0"/>
+              </a:ext>
+            </a:extLst>
+          </a:blip>
+          <a:stretch>
+            <a:fillRect/>
+          </a:stretch>
+        </p:blipFill>
+        <p:spPr>
+          <a:xfrm>
+            <a:off x="2829943" y="3670957"/>
+            <a:ext cx="2303166" cy="347793"/>
+          </a:xfrm>
+          <a:prstGeom prst="rect">
+            <a:avLst/>
+          </a:prstGeom>
+        </p:spPr>
+      </p:pic>
     </p:spTree>
     <p:extLst>
       <p:ext uri="{BB962C8B-B14F-4D97-AF65-F5344CB8AC3E}">
-        <p14:creationId xmlns:p14="http://schemas.microsoft.com/office/powerpoint/2010/main" val="1195912630"/>
+        <p14:creationId xmlns:p14="http://schemas.microsoft.com/office/powerpoint/2010/main" val="747806235"/>
       </p:ext>
     </p:extLst>
   </p:cSld>
@@ -2958,7 +4071,7 @@
           <a:p>
             <a:fld id="{0F78D9C4-20C1-4B15-A116-16DC77AD9A1E}" type="datetime1">
               <a:rPr lang="ko-KR" altLang="en-US" smtClean="0"/>
-              <a:t>2025-09-11</a:t>
+              <a:t>2026-02-10</a:t>
             </a:fld>
             <a:endParaRPr lang="ko-KR" altLang="en-US"/>
           </a:p>
@@ -3492,7 +4605,7 @@
           <a:p>
             <a:fld id="{0F78D9C4-20C1-4B15-A116-16DC77AD9A1E}" type="datetime1">
               <a:rPr lang="ko-KR" altLang="en-US" smtClean="0"/>
-              <a:t>2025-09-11</a:t>
+              <a:t>2026-02-10</a:t>
             </a:fld>
             <a:endParaRPr lang="ko-KR" altLang="en-US"/>
           </a:p>
@@ -3615,7 +4728,7 @@
           <a:p>
             <a:fld id="{0F78D9C4-20C1-4B15-A116-16DC77AD9A1E}" type="datetime1">
               <a:rPr lang="ko-KR" altLang="en-US" smtClean="0"/>
-              <a:t>2025-09-11</a:t>
+              <a:t>2026-02-10</a:t>
             </a:fld>
             <a:endParaRPr lang="ko-KR" altLang="en-US"/>
           </a:p>
@@ -3838,7 +4951,7 @@
           <a:p>
             <a:fld id="{0F78D9C4-20C1-4B15-A116-16DC77AD9A1E}" type="datetime1">
               <a:rPr lang="ko-KR" altLang="en-US" smtClean="0"/>
-              <a:t>2025-09-11</a:t>
+              <a:t>2026-02-10</a:t>
             </a:fld>
             <a:endParaRPr lang="ko-KR" altLang="en-US"/>
           </a:p>
@@ -4128,7 +5241,7 @@
           <a:p>
             <a:fld id="{0F78D9C4-20C1-4B15-A116-16DC77AD9A1E}" type="datetime1">
               <a:rPr lang="ko-KR" altLang="en-US" smtClean="0"/>
-              <a:t>2025-09-11</a:t>
+              <a:t>2026-02-10</a:t>
             </a:fld>
             <a:endParaRPr lang="ko-KR" altLang="en-US"/>
           </a:p>
@@ -4663,7 +5776,7 @@
           <a:p>
             <a:fld id="{0F78D9C4-20C1-4B15-A116-16DC77AD9A1E}" type="datetime1">
               <a:rPr lang="ko-KR" altLang="en-US" smtClean="0"/>
-              <a:t>2025-09-11</a:t>
+              <a:t>2026-02-10</a:t>
             </a:fld>
             <a:endParaRPr lang="ko-KR" altLang="en-US"/>
           </a:p>
@@ -4912,7 +6025,7 @@
           <a:p>
             <a:fld id="{0F78D9C4-20C1-4B15-A116-16DC77AD9A1E}" type="datetime1">
               <a:rPr lang="ko-KR" altLang="en-US" smtClean="0"/>
-              <a:t>2025-09-11</a:t>
+              <a:t>2026-02-10</a:t>
             </a:fld>
             <a:endParaRPr lang="ko-KR" altLang="en-US"/>
           </a:p>
@@ -5268,7 +6381,7 @@
           <a:p>
             <a:fld id="{0F78D9C4-20C1-4B15-A116-16DC77AD9A1E}" type="datetime1">
               <a:rPr lang="ko-KR" altLang="en-US" smtClean="0"/>
-              <a:t>2025-09-11</a:t>
+              <a:t>2026-02-10</a:t>
             </a:fld>
             <a:endParaRPr lang="ko-KR" altLang="en-US"/>
           </a:p>
@@ -5492,7 +6605,7 @@
           <a:p>
             <a:fld id="{0F78D9C4-20C1-4B15-A116-16DC77AD9A1E}" type="datetime1">
               <a:rPr lang="ko-KR" altLang="en-US" smtClean="0"/>
-              <a:t>2025-09-11</a:t>
+              <a:t>2026-02-10</a:t>
             </a:fld>
             <a:endParaRPr lang="ko-KR" altLang="en-US"/>
           </a:p>
@@ -5725,7 +6838,7 @@
           <a:p>
             <a:fld id="{0F78D9C4-20C1-4B15-A116-16DC77AD9A1E}" type="datetime1">
               <a:rPr lang="ko-KR" altLang="en-US" smtClean="0"/>
-              <a:t>2025-09-11</a:t>
+              <a:t>2026-02-10</a:t>
             </a:fld>
             <a:endParaRPr lang="ko-KR" altLang="en-US"/>
           </a:p>
@@ -5854,7 +6967,7 @@
           <a:p>
             <a:fld id="{0F78D9C4-20C1-4B15-A116-16DC77AD9A1E}" type="datetime1">
               <a:rPr lang="ko-KR" altLang="en-US" smtClean="0"/>
-              <a:t>2025-09-11</a:t>
+              <a:t>2026-02-10</a:t>
             </a:fld>
             <a:endParaRPr lang="ko-KR" altLang="en-US"/>
           </a:p>
@@ -6129,7 +7242,7 @@
           <a:p>
             <a:fld id="{0F78D9C4-20C1-4B15-A116-16DC77AD9A1E}" type="datetime1">
               <a:rPr lang="ko-KR" altLang="en-US" smtClean="0"/>
-              <a:t>2025-09-11</a:t>
+              <a:t>2026-02-10</a:t>
             </a:fld>
             <a:endParaRPr lang="ko-KR" altLang="en-US"/>
           </a:p>
@@ -6429,7 +7542,7 @@
           <a:p>
             <a:fld id="{0F78D9C4-20C1-4B15-A116-16DC77AD9A1E}" type="datetime1">
               <a:rPr lang="ko-KR" altLang="en-US" smtClean="0"/>
-              <a:t>2025-09-11</a:t>
+              <a:t>2026-02-10</a:t>
             </a:fld>
             <a:endParaRPr lang="ko-KR" altLang="en-US"/>
           </a:p>
@@ -6558,7 +7671,7 @@
           <a:p>
             <a:fld id="{0F78D9C4-20C1-4B15-A116-16DC77AD9A1E}" type="datetime1">
               <a:rPr lang="ko-KR" altLang="en-US" smtClean="0"/>
-              <a:t>2025-09-11</a:t>
+              <a:t>2026-02-10</a:t>
             </a:fld>
             <a:endParaRPr lang="ko-KR" altLang="en-US"/>
           </a:p>
@@ -6715,15 +7828,25 @@
             </a:pPr>
             <a:r>
               <a:rPr lang="ko-KR" altLang="en-US" sz="3200" dirty="0"/>
-              <a:t>검색하지 않고 </a:t>
-            </a:r>
-            <a:r>
-              <a:rPr lang="ko-KR" altLang="en-US" sz="3200" dirty="0" err="1"/>
-              <a:t>가능한한</a:t>
+              <a:t>검색하지 않고 가능한한 스스로 풀어보도록 합시다</a:t>
+            </a:r>
+            <a:endParaRPr lang="en-US" altLang="ko-KR" sz="3200" dirty="0"/>
+          </a:p>
+          <a:p>
+            <a:pPr>
+              <a:lnSpc>
+                <a:spcPct val="150000"/>
+              </a:lnSpc>
+              <a:buFont typeface="Wingdings" pitchFamily="2" charset="2"/>
+              <a:buChar char="§"/>
+            </a:pPr>
+            <a:r>
+              <a:rPr lang="en-US" altLang="ko-KR" sz="3200" dirty="0"/>
+              <a:t>quiz1.ipynb</a:t>
             </a:r>
             <a:r>
               <a:rPr lang="ko-KR" altLang="en-US" sz="3200" dirty="0"/>
-              <a:t> 스스로 풀어보도록 합시다</a:t>
+              <a:t> 파일 참고</a:t>
             </a:r>
             <a:endParaRPr lang="en-US" altLang="ko-KR" sz="3200" dirty="0"/>
           </a:p>
@@ -6814,7 +7937,7 @@
           <a:p>
             <a:fld id="{0F78D9C4-20C1-4B15-A116-16DC77AD9A1E}" type="datetime1">
               <a:rPr lang="ko-KR" altLang="en-US" smtClean="0"/>
-              <a:t>2025-09-11</a:t>
+              <a:t>2026-02-10</a:t>
             </a:fld>
             <a:endParaRPr lang="ko-KR" altLang="en-US"/>
           </a:p>
@@ -6979,7 +8102,7 @@
           <a:p>
             <a:fld id="{0F78D9C4-20C1-4B15-A116-16DC77AD9A1E}" type="datetime1">
               <a:rPr lang="ko-KR" altLang="en-US" smtClean="0"/>
-              <a:t>2025-09-11</a:t>
+              <a:t>2026-02-10</a:t>
             </a:fld>
             <a:endParaRPr lang="ko-KR" altLang="en-US"/>
           </a:p>
@@ -7177,7 +8300,7 @@
           <a:p>
             <a:fld id="{0F78D9C4-20C1-4B15-A116-16DC77AD9A1E}" type="datetime1">
               <a:rPr lang="ko-KR" altLang="en-US" smtClean="0"/>
-              <a:t>2025-09-11</a:t>
+              <a:t>2026-02-10</a:t>
             </a:fld>
             <a:endParaRPr lang="ko-KR" altLang="en-US"/>
           </a:p>
@@ -7356,7 +8479,7 @@
           <a:p>
             <a:fld id="{0F78D9C4-20C1-4B15-A116-16DC77AD9A1E}" type="datetime1">
               <a:rPr lang="ko-KR" altLang="en-US" smtClean="0"/>
-              <a:t>2025-09-11</a:t>
+              <a:t>2026-02-10</a:t>
             </a:fld>
             <a:endParaRPr lang="ko-KR" altLang="en-US"/>
           </a:p>
@@ -7624,7 +8747,7 @@
           <a:p>
             <a:fld id="{0F78D9C4-20C1-4B15-A116-16DC77AD9A1E}" type="datetime1">
               <a:rPr lang="ko-KR" altLang="en-US" smtClean="0"/>
-              <a:t>2025-09-11</a:t>
+              <a:t>2026-02-10</a:t>
             </a:fld>
             <a:endParaRPr lang="ko-KR" altLang="en-US"/>
           </a:p>
@@ -7851,7 +8974,7 @@
           <a:p>
             <a:fld id="{0F78D9C4-20C1-4B15-A116-16DC77AD9A1E}" type="datetime1">
               <a:rPr lang="ko-KR" altLang="en-US" smtClean="0"/>
-              <a:t>2025-09-11</a:t>
+              <a:t>2026-02-10</a:t>
             </a:fld>
             <a:endParaRPr lang="ko-KR" altLang="en-US"/>
           </a:p>
@@ -8076,7 +9199,7 @@
           <a:p>
             <a:fld id="{0F78D9C4-20C1-4B15-A116-16DC77AD9A1E}" type="datetime1">
               <a:rPr lang="ko-KR" altLang="en-US" smtClean="0"/>
-              <a:t>2025-09-11</a:t>
+              <a:t>2026-02-10</a:t>
             </a:fld>
             <a:endParaRPr lang="ko-KR" altLang="en-US"/>
           </a:p>
@@ -8369,7 +9492,7 @@
           <a:p>
             <a:fld id="{0F78D9C4-20C1-4B15-A116-16DC77AD9A1E}" type="datetime1">
               <a:rPr lang="ko-KR" altLang="en-US" smtClean="0"/>
-              <a:t>2025-09-11</a:t>
+              <a:t>2026-02-10</a:t>
             </a:fld>
             <a:endParaRPr lang="ko-KR" altLang="en-US"/>
           </a:p>
@@ -8853,7 +9976,7 @@
           <a:p>
             <a:fld id="{0F78D9C4-20C1-4B15-A116-16DC77AD9A1E}" type="datetime1">
               <a:rPr lang="ko-KR" altLang="en-US" smtClean="0"/>
-              <a:t>2025-09-11</a:t>
+              <a:t>2026-02-10</a:t>
             </a:fld>
             <a:endParaRPr lang="ko-KR" altLang="en-US"/>
           </a:p>
@@ -9129,7 +10252,7 @@
           <a:p>
             <a:fld id="{0F78D9C4-20C1-4B15-A116-16DC77AD9A1E}" type="datetime1">
               <a:rPr lang="ko-KR" altLang="en-US" smtClean="0"/>
-              <a:t>2025-09-11</a:t>
+              <a:t>2026-02-10</a:t>
             </a:fld>
             <a:endParaRPr lang="ko-KR" altLang="en-US"/>
           </a:p>
@@ -9223,7 +10346,7 @@
 </file>
 
 <file path=ppt/slides/slide32.xml><?xml version="1.0" encoding="utf-8"?>
-<p:sld xmlns:a="http://schemas.openxmlformats.org/drawingml/2006/main" xmlns:r="http://schemas.openxmlformats.org/officeDocument/2006/relationships" xmlns:p="http://schemas.openxmlformats.org/presentationml/2006/main">
+<p:sld xmlns:a="http://schemas.openxmlformats.org/drawingml/2006/main" xmlns:r="http://schemas.openxmlformats.org/officeDocument/2006/relationships" xmlns:p="http://schemas.openxmlformats.org/presentationml/2006/main" show="0">
   <p:cSld>
     <p:spTree>
       <p:nvGrpSpPr>
@@ -9449,7 +10572,7 @@
           <a:p>
             <a:fld id="{0F78D9C4-20C1-4B15-A116-16DC77AD9A1E}" type="datetime1">
               <a:rPr lang="ko-KR" altLang="en-US" smtClean="0"/>
-              <a:t>2025-09-11</a:t>
+              <a:t>2026-02-10</a:t>
             </a:fld>
             <a:endParaRPr lang="ko-KR" altLang="en-US" dirty="0"/>
           </a:p>
@@ -9569,7 +10692,7 @@
           <a:p>
             <a:fld id="{0F78D9C4-20C1-4B15-A116-16DC77AD9A1E}" type="datetime1">
               <a:rPr lang="ko-KR" altLang="en-US" smtClean="0"/>
-              <a:t>2025-09-11</a:t>
+              <a:t>2026-02-10</a:t>
             </a:fld>
             <a:endParaRPr lang="ko-KR" altLang="en-US" dirty="0"/>
           </a:p>
@@ -9730,7 +10853,7 @@
           <a:p>
             <a:fld id="{0F78D9C4-20C1-4B15-A116-16DC77AD9A1E}" type="datetime1">
               <a:rPr lang="ko-KR" altLang="en-US" smtClean="0"/>
-              <a:t>2025-09-11</a:t>
+              <a:t>2026-02-10</a:t>
             </a:fld>
             <a:endParaRPr lang="ko-KR" altLang="en-US" dirty="0"/>
           </a:p>
@@ -9891,7 +11014,7 @@
           <a:p>
             <a:fld id="{0F78D9C4-20C1-4B15-A116-16DC77AD9A1E}" type="datetime1">
               <a:rPr lang="ko-KR" altLang="en-US" smtClean="0"/>
-              <a:t>2025-09-11</a:t>
+              <a:t>2026-02-10</a:t>
             </a:fld>
             <a:endParaRPr lang="ko-KR" altLang="en-US" dirty="0"/>
           </a:p>
@@ -10107,7 +11230,7 @@
           <a:p>
             <a:fld id="{0F78D9C4-20C1-4B15-A116-16DC77AD9A1E}" type="datetime1">
               <a:rPr lang="ko-KR" altLang="en-US" smtClean="0"/>
-              <a:t>2025-09-11</a:t>
+              <a:t>2026-02-10</a:t>
             </a:fld>
             <a:endParaRPr lang="ko-KR" altLang="en-US" dirty="0"/>
           </a:p>
@@ -10268,7 +11391,7 @@
           <a:p>
             <a:fld id="{0F78D9C4-20C1-4B15-A116-16DC77AD9A1E}" type="datetime1">
               <a:rPr lang="ko-KR" altLang="en-US" smtClean="0"/>
-              <a:t>2025-09-11</a:t>
+              <a:t>2026-02-10</a:t>
             </a:fld>
             <a:endParaRPr lang="ko-KR" altLang="en-US" dirty="0"/>
           </a:p>
@@ -10397,7 +11520,7 @@
           <a:p>
             <a:fld id="{0F78D9C4-20C1-4B15-A116-16DC77AD9A1E}" type="datetime1">
               <a:rPr lang="ko-KR" altLang="en-US" smtClean="0"/>
-              <a:t>2025-09-11</a:t>
+              <a:t>2026-02-10</a:t>
             </a:fld>
             <a:endParaRPr lang="ko-KR" altLang="en-US"/>
           </a:p>
@@ -10776,7 +11899,7 @@
           <a:p>
             <a:fld id="{0F78D9C4-20C1-4B15-A116-16DC77AD9A1E}" type="datetime1">
               <a:rPr lang="ko-KR" altLang="en-US" smtClean="0"/>
-              <a:t>2025-09-11</a:t>
+              <a:t>2026-02-10</a:t>
             </a:fld>
             <a:endParaRPr lang="ko-KR" altLang="en-US"/>
           </a:p>
@@ -12241,7 +13364,7 @@
           <a:p>
             <a:fld id="{0F78D9C4-20C1-4B15-A116-16DC77AD9A1E}" type="datetime1">
               <a:rPr lang="ko-KR" altLang="en-US" smtClean="0"/>
-              <a:t>2025-09-11</a:t>
+              <a:t>2026-02-10</a:t>
             </a:fld>
             <a:endParaRPr lang="ko-KR" altLang="en-US"/>
           </a:p>
@@ -12617,6 +13740,108 @@
           </a:p>
         </p:txBody>
       </p:sp>
+      <mc:AlternateContent xmlns:mc="http://schemas.openxmlformats.org/markup-compatibility/2006">
+        <mc:Choice xmlns:p14="http://schemas.microsoft.com/office/powerpoint/2010/main" Requires="p14">
+          <p:contentPart p14:bwMode="auto" r:id="rId5">
+            <p14:nvContentPartPr>
+              <p14:cNvPr id="14" name="잉크 13">
+                <a:extLst>
+                  <a:ext uri="{FF2B5EF4-FFF2-40B4-BE49-F238E27FC236}">
+                    <a16:creationId xmlns:a16="http://schemas.microsoft.com/office/drawing/2014/main" id="{089C1E6D-1781-D25E-10B5-08CA94B177E3}"/>
+                  </a:ext>
+                </a:extLst>
+              </p14:cNvPr>
+              <p14:cNvContentPartPr/>
+              <p14:nvPr/>
+            </p14:nvContentPartPr>
+            <p14:xfrm>
+              <a:off x="7957615" y="2598791"/>
+              <a:ext cx="1197720" cy="360"/>
+            </p14:xfrm>
+          </p:contentPart>
+        </mc:Choice>
+        <mc:Fallback>
+          <p:pic>
+            <p:nvPicPr>
+              <p:cNvPr id="14" name="잉크 13">
+                <a:extLst>
+                  <a:ext uri="{FF2B5EF4-FFF2-40B4-BE49-F238E27FC236}">
+                    <a16:creationId xmlns:a16="http://schemas.microsoft.com/office/drawing/2014/main" id="{089C1E6D-1781-D25E-10B5-08CA94B177E3}"/>
+                  </a:ext>
+                </a:extLst>
+              </p:cNvPr>
+              <p:cNvPicPr/>
+              <p:nvPr/>
+            </p:nvPicPr>
+            <p:blipFill>
+              <a:blip r:embed="rId6"/>
+              <a:stretch>
+                <a:fillRect/>
+              </a:stretch>
+            </p:blipFill>
+            <p:spPr>
+              <a:xfrm>
+                <a:off x="7903615" y="2490791"/>
+                <a:ext cx="1305360" cy="216000"/>
+              </a:xfrm>
+              <a:prstGeom prst="rect">
+                <a:avLst/>
+              </a:prstGeom>
+            </p:spPr>
+          </p:pic>
+        </mc:Fallback>
+      </mc:AlternateContent>
+      <mc:AlternateContent xmlns:mc="http://schemas.openxmlformats.org/markup-compatibility/2006">
+        <mc:Choice xmlns:p14="http://schemas.microsoft.com/office/powerpoint/2010/main" Requires="p14">
+          <p:contentPart p14:bwMode="auto" r:id="rId7">
+            <p14:nvContentPartPr>
+              <p14:cNvPr id="15" name="잉크 14">
+                <a:extLst>
+                  <a:ext uri="{FF2B5EF4-FFF2-40B4-BE49-F238E27FC236}">
+                    <a16:creationId xmlns:a16="http://schemas.microsoft.com/office/drawing/2014/main" id="{935C14A7-6818-15CF-AA3F-07FF07A21DC9}"/>
+                  </a:ext>
+                </a:extLst>
+              </p14:cNvPr>
+              <p14:cNvContentPartPr/>
+              <p14:nvPr/>
+            </p14:nvContentPartPr>
+            <p14:xfrm>
+              <a:off x="8266495" y="2944751"/>
+              <a:ext cx="591840" cy="360"/>
+            </p14:xfrm>
+          </p:contentPart>
+        </mc:Choice>
+        <mc:Fallback>
+          <p:pic>
+            <p:nvPicPr>
+              <p:cNvPr id="15" name="잉크 14">
+                <a:extLst>
+                  <a:ext uri="{FF2B5EF4-FFF2-40B4-BE49-F238E27FC236}">
+                    <a16:creationId xmlns:a16="http://schemas.microsoft.com/office/drawing/2014/main" id="{935C14A7-6818-15CF-AA3F-07FF07A21DC9}"/>
+                  </a:ext>
+                </a:extLst>
+              </p:cNvPr>
+              <p:cNvPicPr/>
+              <p:nvPr/>
+            </p:nvPicPr>
+            <p:blipFill>
+              <a:blip r:embed="rId8"/>
+              <a:stretch>
+                <a:fillRect/>
+              </a:stretch>
+            </p:blipFill>
+            <p:spPr>
+              <a:xfrm>
+                <a:off x="8212855" y="2836751"/>
+                <a:ext cx="699480" cy="216000"/>
+              </a:xfrm>
+              <a:prstGeom prst="rect">
+                <a:avLst/>
+              </a:prstGeom>
+            </p:spPr>
+          </p:pic>
+        </mc:Fallback>
+      </mc:AlternateContent>
     </p:spTree>
     <p:extLst>
       <p:ext uri="{BB962C8B-B14F-4D97-AF65-F5344CB8AC3E}">
@@ -12665,13 +13890,13 @@
         </p:nvSpPr>
         <p:spPr>
           <a:xfrm>
-            <a:off x="332739" y="1152843"/>
-            <a:ext cx="11526521" cy="4648517"/>
+            <a:off x="391159" y="1274763"/>
+            <a:ext cx="10515600" cy="4555120"/>
           </a:xfrm>
         </p:spPr>
         <p:txBody>
           <a:bodyPr>
-            <a:noAutofit/>
+            <a:normAutofit lnSpcReduction="10000"/>
           </a:bodyPr>
           <a:lstStyle/>
           <a:p>
@@ -12685,19 +13910,7 @@
               <a:rPr lang="ko-KR" altLang="en-US" b="1" dirty="0">
                 <a:latin typeface="+mn-ea"/>
               </a:rPr>
-              <a:t>✔️ </a:t>
-            </a:r>
-            <a:r>
-              <a:rPr lang="en-US" altLang="ko-KR" b="1" dirty="0">
-                <a:latin typeface="+mn-ea"/>
-              </a:rPr>
-              <a:t>CUDA</a:t>
-            </a:r>
-            <a:r>
-              <a:rPr lang="ko-KR" altLang="en-US" b="1" dirty="0">
-                <a:latin typeface="+mn-ea"/>
-              </a:rPr>
-              <a:t> 설치 </a:t>
+              <a:t>✔️ 설치 없이 하기</a:t>
             </a:r>
             <a:endParaRPr lang="en-US" altLang="ko-KR" b="1" dirty="0">
               <a:latin typeface="+mn-ea"/>
@@ -12713,25 +13926,25 @@
               <a:rPr lang="en-US" altLang="ko-KR" dirty="0">
                 <a:latin typeface="+mn-ea"/>
               </a:rPr>
-              <a:t>CUDA : NVIDIA</a:t>
+              <a:t>Google </a:t>
+            </a:r>
+            <a:r>
+              <a:rPr lang="en-US" altLang="ko-KR" dirty="0" err="1">
+                <a:latin typeface="+mn-ea"/>
+              </a:rPr>
+              <a:t>Colab</a:t>
+            </a:r>
+            <a:r>
+              <a:rPr lang="en-US" altLang="ko-KR" dirty="0">
+                <a:latin typeface="+mn-ea"/>
+              </a:rPr>
+              <a:t> </a:t>
             </a:r>
             <a:r>
               <a:rPr lang="ko-KR" altLang="en-US" dirty="0">
                 <a:latin typeface="+mn-ea"/>
               </a:rPr>
-              <a:t>가 개발한 병렬 컴퓨팅 플랫폼으로</a:t>
-            </a:r>
-            <a:r>
-              <a:rPr lang="en-US" altLang="ko-KR" dirty="0">
-                <a:latin typeface="+mn-ea"/>
-              </a:rPr>
-              <a:t>, GPU</a:t>
-            </a:r>
-            <a:r>
-              <a:rPr lang="ko-KR" altLang="en-US" dirty="0">
-                <a:latin typeface="+mn-ea"/>
-              </a:rPr>
-              <a:t>를 활용해 대규모 데이터 처리와 복잡한 계산을 빠르게 수행할 수 있도록 지원함</a:t>
+              <a:t>이용</a:t>
             </a:r>
             <a:endParaRPr lang="en-US" altLang="ko-KR" dirty="0">
               <a:latin typeface="+mn-ea"/>
@@ -12744,30 +13957,16 @@
               </a:lnSpc>
             </a:pPr>
             <a:r>
-              <a:rPr lang="ko-KR" altLang="en-US" dirty="0">
-                <a:latin typeface="+mn-ea"/>
-              </a:rPr>
-              <a:t>강의에서는 </a:t>
-            </a:r>
-            <a:r>
-              <a:rPr lang="en-US" altLang="ko-KR" dirty="0" err="1">
-                <a:latin typeface="+mn-ea"/>
-              </a:rPr>
-              <a:t>cuda</a:t>
-            </a:r>
-            <a:r>
               <a:rPr lang="en-US" altLang="ko-KR" dirty="0">
                 <a:latin typeface="+mn-ea"/>
-              </a:rPr>
-              <a:t> version 11.8 </a:t>
-            </a:r>
-            <a:r>
-              <a:rPr lang="ko-KR" altLang="en-US" dirty="0">
-                <a:latin typeface="+mn-ea"/>
-              </a:rPr>
-              <a:t>로 설치</a:t>
+                <a:hlinkClick r:id="rId3"/>
+              </a:rPr>
+              <a:t>https://colab.research.google.com/</a:t>
             </a:r>
             <a:endParaRPr lang="en-US" altLang="ko-KR" dirty="0">
+              <a:solidFill>
+                <a:srgbClr val="FF0000"/>
+              </a:solidFill>
               <a:latin typeface="+mn-ea"/>
             </a:endParaRPr>
           </a:p>
@@ -12777,14 +13976,12 @@
                 <a:spcPct val="150000"/>
               </a:lnSpc>
             </a:pPr>
-            <a:r>
-              <a:rPr lang="en-US" altLang="ko-KR" dirty="0">
-                <a:latin typeface="+mn-ea"/>
-                <a:hlinkClick r:id="rId2"/>
-              </a:rPr>
-              <a:t>https://developer.nvidia.com/cuda-11-8-0-download-archive</a:t>
-            </a:r>
-            <a:endParaRPr lang="en-US" altLang="ko-KR" dirty="0"/>
+            <a:endParaRPr lang="en-US" altLang="ko-KR" dirty="0">
+              <a:solidFill>
+                <a:srgbClr val="FF0000"/>
+              </a:solidFill>
+              <a:latin typeface="+mn-ea"/>
+            </a:endParaRPr>
           </a:p>
           <a:p>
             <a:pPr marL="0" indent="0">
@@ -12800,15 +13997,38 @@
               <a:t>✔️ </a:t>
             </a:r>
             <a:r>
-              <a:rPr lang="ko-KR" altLang="en-US" b="1" dirty="0"/>
-              <a:t>환경에 맞는 설치 명령어 획득 가능</a:t>
-            </a:r>
-            <a:r>
-              <a:rPr lang="en-US" altLang="ko-KR" b="1" dirty="0">
+              <a:rPr lang="ko-KR" altLang="en-US" dirty="0">
+                <a:solidFill>
+                  <a:srgbClr val="FF0000"/>
+                </a:solidFill>
                 <a:latin typeface="+mn-ea"/>
               </a:rPr>
-              <a:t> </a:t>
-            </a:r>
+              <a:t>로컬 </a:t>
+            </a:r>
+            <a:r>
+              <a:rPr lang="en-US" altLang="ko-KR" dirty="0">
+                <a:solidFill>
+                  <a:srgbClr val="FF0000"/>
+                </a:solidFill>
+                <a:latin typeface="+mn-ea"/>
+              </a:rPr>
+              <a:t>CPU </a:t>
+            </a:r>
+            <a:r>
+              <a:rPr lang="ko-KR" altLang="en-US" dirty="0">
+                <a:solidFill>
+                  <a:srgbClr val="FF0000"/>
+                </a:solidFill>
+                <a:latin typeface="+mn-ea"/>
+              </a:rPr>
+              <a:t>환경 이용</a:t>
+            </a:r>
+            <a:endParaRPr lang="en-US" altLang="ko-KR" dirty="0">
+              <a:solidFill>
+                <a:srgbClr val="FF0000"/>
+              </a:solidFill>
+              <a:latin typeface="+mn-ea"/>
+            </a:endParaRPr>
           </a:p>
           <a:p>
             <a:pPr lvl="1">
@@ -12817,11 +14037,53 @@
               </a:lnSpc>
             </a:pPr>
             <a:r>
-              <a:rPr lang="en-US" altLang="ko-KR" dirty="0">
-                <a:hlinkClick r:id="rId3"/>
-              </a:rPr>
-              <a:t>https://pytorch.org/get-started/locally/</a:t>
-            </a:r>
+              <a:rPr lang="ko-KR" altLang="en-US" dirty="0"/>
+              <a:t>윈도우용 </a:t>
+            </a:r>
+            <a:r>
+              <a:rPr lang="en-US" altLang="ko-KR" dirty="0" err="1"/>
+              <a:t>PyTorch</a:t>
+            </a:r>
+            <a:r>
+              <a:rPr lang="ko-KR" altLang="en-US" dirty="0"/>
+              <a:t>는 </a:t>
+            </a:r>
+            <a:r>
+              <a:rPr lang="en-US" altLang="ko-KR" dirty="0"/>
+              <a:t>Python 3.10~3.14 </a:t>
+            </a:r>
+            <a:r>
+              <a:rPr lang="ko-KR" altLang="en-US" dirty="0"/>
+              <a:t>버전만 지원 됨</a:t>
+            </a:r>
+            <a:r>
+              <a:rPr lang="en-US" altLang="ko-KR" dirty="0"/>
+              <a:t>.</a:t>
+            </a:r>
+          </a:p>
+          <a:p>
+            <a:pPr lvl="1">
+              <a:lnSpc>
+                <a:spcPct val="150000"/>
+              </a:lnSpc>
+            </a:pPr>
+            <a:r>
+              <a:rPr lang="en-US" altLang="ko-KR" dirty="0"/>
+              <a:t>pip3 install torch </a:t>
+            </a:r>
+            <a:r>
+              <a:rPr lang="en-US" altLang="ko-KR" dirty="0" err="1"/>
+              <a:t>torchvision</a:t>
+            </a:r>
+            <a:endParaRPr lang="en-US" altLang="ko-KR" dirty="0"/>
+          </a:p>
+          <a:p>
+            <a:pPr marL="457200" lvl="1" indent="0">
+              <a:lnSpc>
+                <a:spcPct val="150000"/>
+              </a:lnSpc>
+              <a:buNone/>
+            </a:pPr>
             <a:endParaRPr lang="en-US" altLang="ko-KR" dirty="0">
               <a:latin typeface="+mn-ea"/>
             </a:endParaRPr>
@@ -12851,7 +14113,7 @@
           <a:p>
             <a:fld id="{0F78D9C4-20C1-4B15-A116-16DC77AD9A1E}" type="datetime1">
               <a:rPr lang="ko-KR" altLang="en-US" smtClean="0"/>
-              <a:t>2025-09-11</a:t>
+              <a:t>2026-02-10</a:t>
             </a:fld>
             <a:endParaRPr lang="ko-KR" altLang="en-US"/>
           </a:p>
@@ -12891,7 +14153,7 @@
           <p:cNvPr id="6" name="제목 5">
             <a:extLst>
               <a:ext uri="{FF2B5EF4-FFF2-40B4-BE49-F238E27FC236}">
-                <a16:creationId xmlns:a16="http://schemas.microsoft.com/office/drawing/2014/main" id="{7403C876-D748-2647-ADE4-826E71ABB306}"/>
+                <a16:creationId xmlns:a16="http://schemas.microsoft.com/office/drawing/2014/main" id="{68282B2B-A65A-C4A4-7698-62A4D30B3855}"/>
               </a:ext>
             </a:extLst>
           </p:cNvPr>
@@ -12932,7 +14194,7 @@
     </p:spTree>
     <p:extLst>
       <p:ext uri="{BB962C8B-B14F-4D97-AF65-F5344CB8AC3E}">
-        <p14:creationId xmlns:p14="http://schemas.microsoft.com/office/powerpoint/2010/main" val="1104853011"/>
+        <p14:creationId xmlns:p14="http://schemas.microsoft.com/office/powerpoint/2010/main" val="2788036752"/>
       </p:ext>
     </p:extLst>
   </p:cSld>
@@ -12977,13 +14239,13 @@
         </p:nvSpPr>
         <p:spPr>
           <a:xfrm>
-            <a:off x="391159" y="1274763"/>
-            <a:ext cx="10515600" cy="4555120"/>
+            <a:off x="332739" y="1152843"/>
+            <a:ext cx="11526521" cy="4648517"/>
           </a:xfrm>
         </p:spPr>
         <p:txBody>
           <a:bodyPr>
-            <a:normAutofit/>
+            <a:noAutofit/>
           </a:bodyPr>
           <a:lstStyle/>
           <a:p>
@@ -12997,7 +14259,19 @@
               <a:rPr lang="ko-KR" altLang="en-US" b="1" dirty="0">
                 <a:latin typeface="+mn-ea"/>
               </a:rPr>
-              <a:t>✔️ 설치 없이 하기</a:t>
+              <a:t>✔️ </a:t>
+            </a:r>
+            <a:r>
+              <a:rPr lang="en-US" altLang="ko-KR" b="1" dirty="0">
+                <a:latin typeface="+mn-ea"/>
+              </a:rPr>
+              <a:t>CUDA</a:t>
+            </a:r>
+            <a:r>
+              <a:rPr lang="ko-KR" altLang="en-US" b="1" dirty="0">
+                <a:latin typeface="+mn-ea"/>
+              </a:rPr>
+              <a:t> 설치 </a:t>
             </a:r>
             <a:endParaRPr lang="en-US" altLang="ko-KR" b="1" dirty="0">
               <a:latin typeface="+mn-ea"/>
@@ -13013,25 +14287,25 @@
               <a:rPr lang="en-US" altLang="ko-KR" dirty="0">
                 <a:latin typeface="+mn-ea"/>
               </a:rPr>
-              <a:t>Google </a:t>
-            </a:r>
-            <a:r>
-              <a:rPr lang="en-US" altLang="ko-KR" dirty="0" err="1">
+              <a:t>CUDA : NVIDIA</a:t>
+            </a:r>
+            <a:r>
+              <a:rPr lang="ko-KR" altLang="en-US" dirty="0">
                 <a:latin typeface="+mn-ea"/>
               </a:rPr>
-              <a:t>Colab</a:t>
+              <a:t>가 개발한 병렬 컴퓨팅 플랫폼으로</a:t>
             </a:r>
             <a:r>
               <a:rPr lang="en-US" altLang="ko-KR" dirty="0">
                 <a:latin typeface="+mn-ea"/>
               </a:rPr>
-              <a:t> </a:t>
+              <a:t>, GPU</a:t>
             </a:r>
             <a:r>
               <a:rPr lang="ko-KR" altLang="en-US" dirty="0">
                 <a:latin typeface="+mn-ea"/>
               </a:rPr>
-              <a:t>이용</a:t>
+              <a:t>를 활용해 대규모 데이터 처리와 복잡한 계산을 빠르게 수행할 수 있도록 지원함</a:t>
             </a:r>
             <a:endParaRPr lang="en-US" altLang="ko-KR" dirty="0">
               <a:latin typeface="+mn-ea"/>
@@ -13044,19 +14318,88 @@
               </a:lnSpc>
             </a:pPr>
             <a:r>
+              <a:rPr lang="ko-KR" altLang="en-US" dirty="0">
+                <a:latin typeface="+mn-ea"/>
+              </a:rPr>
+              <a:t>강의에서는 </a:t>
+            </a:r>
+            <a:r>
+              <a:rPr lang="en-US" altLang="ko-KR" dirty="0" err="1">
+                <a:latin typeface="+mn-ea"/>
+              </a:rPr>
+              <a:t>cuda</a:t>
+            </a:r>
+            <a:r>
               <a:rPr lang="en-US" altLang="ko-KR" dirty="0">
                 <a:latin typeface="+mn-ea"/>
-                <a:hlinkClick r:id="rId2"/>
-              </a:rPr>
-              <a:t>https://colab.research.google.com/</a:t>
-            </a:r>
-            <a:endParaRPr lang="ko-KR" altLang="en-US" dirty="0">
-              <a:solidFill>
-                <a:srgbClr val="FF0000"/>
-              </a:solidFill>
+              </a:rPr>
+              <a:t> version 11.8 </a:t>
+            </a:r>
+            <a:r>
+              <a:rPr lang="ko-KR" altLang="en-US" dirty="0">
+                <a:latin typeface="+mn-ea"/>
+              </a:rPr>
+              <a:t>로 설치 </a:t>
+            </a:r>
+            <a:endParaRPr lang="en-US" altLang="ko-KR" dirty="0">
               <a:latin typeface="+mn-ea"/>
             </a:endParaRPr>
           </a:p>
+          <a:p>
+            <a:pPr lvl="1">
+              <a:lnSpc>
+                <a:spcPct val="150000"/>
+              </a:lnSpc>
+            </a:pPr>
+            <a:r>
+              <a:rPr lang="en-US" altLang="ko-KR" dirty="0">
+                <a:latin typeface="+mn-ea"/>
+                <a:hlinkClick r:id="rId3"/>
+              </a:rPr>
+              <a:t>https://developer.nvidia.com/cuda-11-8-0-download-archive</a:t>
+            </a:r>
+            <a:endParaRPr lang="en-US" altLang="ko-KR" dirty="0"/>
+          </a:p>
+          <a:p>
+            <a:pPr marL="0" indent="0">
+              <a:lnSpc>
+                <a:spcPct val="150000"/>
+              </a:lnSpc>
+              <a:buNone/>
+            </a:pPr>
+            <a:r>
+              <a:rPr lang="ko-KR" altLang="en-US" b="1" dirty="0">
+                <a:latin typeface="+mn-ea"/>
+              </a:rPr>
+              <a:t>✔️ </a:t>
+            </a:r>
+            <a:r>
+              <a:rPr lang="ko-KR" altLang="en-US" b="1" dirty="0"/>
+              <a:t>환경에 맞는 설치 명령어 획득 가능</a:t>
+            </a:r>
+            <a:r>
+              <a:rPr lang="en-US" altLang="ko-KR" b="1" dirty="0">
+                <a:latin typeface="+mn-ea"/>
+              </a:rPr>
+              <a:t> </a:t>
+            </a:r>
+          </a:p>
+          <a:p>
+            <a:pPr lvl="1">
+              <a:lnSpc>
+                <a:spcPct val="150000"/>
+              </a:lnSpc>
+            </a:pPr>
+            <a:r>
+              <a:rPr lang="en-US" altLang="ko-KR" dirty="0">
+                <a:hlinkClick r:id="rId4"/>
+              </a:rPr>
+              <a:t>https://pytorch.org/get-started/locally/</a:t>
+            </a:r>
+            <a:endParaRPr lang="en-US" altLang="ko-KR" dirty="0">
+              <a:latin typeface="+mn-ea"/>
+            </a:endParaRPr>
+          </a:p>
         </p:txBody>
       </p:sp>
       <p:sp>
@@ -13082,7 +14425,7 @@
           <a:p>
             <a:fld id="{0F78D9C4-20C1-4B15-A116-16DC77AD9A1E}" type="datetime1">
               <a:rPr lang="ko-KR" altLang="en-US" smtClean="0"/>
-              <a:t>2025-09-11</a:t>
+              <a:t>2026-02-10</a:t>
             </a:fld>
             <a:endParaRPr lang="ko-KR" altLang="en-US"/>
           </a:p>
@@ -13122,7 +14465,7 @@
           <p:cNvPr id="6" name="제목 5">
             <a:extLst>
               <a:ext uri="{FF2B5EF4-FFF2-40B4-BE49-F238E27FC236}">
-                <a16:creationId xmlns:a16="http://schemas.microsoft.com/office/drawing/2014/main" id="{68282B2B-A65A-C4A4-7698-62A4D30B3855}"/>
+                <a16:creationId xmlns:a16="http://schemas.microsoft.com/office/drawing/2014/main" id="{7403C876-D748-2647-ADE4-826E71ABB306}"/>
               </a:ext>
             </a:extLst>
           </p:cNvPr>
@@ -13154,7 +14497,25 @@
               <a:rPr lang="ko-KR" altLang="en-US" b="1" dirty="0">
                 <a:latin typeface="+mj-ea"/>
               </a:rPr>
-              <a:t>설치하기</a:t>
+              <a:t>설치하기 </a:t>
+            </a:r>
+            <a:r>
+              <a:rPr lang="en-US" altLang="ko-KR" b="1" dirty="0">
+                <a:latin typeface="+mj-ea"/>
+              </a:rPr>
+              <a:t>(</a:t>
+            </a:r>
+            <a:r>
+              <a:rPr lang="ko-KR" altLang="en-US" b="1" dirty="0">
+                <a:latin typeface="+mj-ea"/>
+              </a:rPr>
+              <a:t>참고용</a:t>
+            </a:r>
+            <a:r>
+              <a:rPr lang="en-US" altLang="ko-KR" b="1" dirty="0">
+                <a:latin typeface="+mj-ea"/>
+              </a:rPr>
+              <a:t>)</a:t>
             </a:r>
             <a:endParaRPr lang="ko-KR" altLang="en-US" dirty="0"/>
           </a:p>
@@ -13163,7 +14524,7 @@
     </p:spTree>
     <p:extLst>
       <p:ext uri="{BB962C8B-B14F-4D97-AF65-F5344CB8AC3E}">
-        <p14:creationId xmlns:p14="http://schemas.microsoft.com/office/powerpoint/2010/main" val="2788036752"/>
+        <p14:creationId xmlns:p14="http://schemas.microsoft.com/office/powerpoint/2010/main" val="1104853011"/>
       </p:ext>
     </p:extLst>
   </p:cSld>
@@ -13213,7 +14574,7 @@
           <a:p>
             <a:fld id="{0F78D9C4-20C1-4B15-A116-16DC77AD9A1E}" type="datetime1">
               <a:rPr lang="ko-KR" altLang="en-US" smtClean="0"/>
-              <a:t>2025-09-11</a:t>
+              <a:t>2026-02-10</a:t>
             </a:fld>
             <a:endParaRPr lang="ko-KR" altLang="en-US"/>
           </a:p>
@@ -13367,7 +14728,7 @@
           <a:p>
             <a:fld id="{0F78D9C4-20C1-4B15-A116-16DC77AD9A1E}" type="datetime1">
               <a:rPr lang="ko-KR" altLang="en-US" smtClean="0"/>
-              <a:t>2025-09-11</a:t>
+              <a:t>2026-02-10</a:t>
             </a:fld>
             <a:endParaRPr lang="ko-KR" altLang="en-US"/>
           </a:p>
